--- a/Operátorok.pptx
+++ b/Operátorok.pptx
@@ -9,10 +9,11 @@
     <p:sldId id="257" r:id="rId3"/>
     <p:sldId id="258" r:id="rId4"/>
     <p:sldId id="259" r:id="rId5"/>
-    <p:sldId id="260" r:id="rId6"/>
-    <p:sldId id="261" r:id="rId7"/>
-    <p:sldId id="262" r:id="rId8"/>
+    <p:sldId id="262" r:id="rId6"/>
+    <p:sldId id="260" r:id="rId7"/>
+    <p:sldId id="261" r:id="rId8"/>
     <p:sldId id="263" r:id="rId9"/>
+    <p:sldId id="264" r:id="rId10"/>
   </p:sldIdLst>
   <p:sldSz cx="12192000" cy="6858000"/>
   <p:notesSz cx="6858000" cy="9144000"/>
@@ -266,7 +267,7 @@
           <a:p>
             <a:fld id="{49A1C7AC-5350-4AE7-A316-A33A7FEEB943}" type="datetimeFigureOut">
               <a:rPr lang="hu-HU" smtClean="0"/>
-              <a:t>2026. 10. 01.</a:t>
+              <a:t>2026. 10. 08.</a:t>
             </a:fld>
             <a:endParaRPr lang="hu-HU"/>
           </a:p>
@@ -464,7 +465,7 @@
           <a:p>
             <a:fld id="{49A1C7AC-5350-4AE7-A316-A33A7FEEB943}" type="datetimeFigureOut">
               <a:rPr lang="hu-HU" smtClean="0"/>
-              <a:t>2026. 10. 01.</a:t>
+              <a:t>2026. 10. 08.</a:t>
             </a:fld>
             <a:endParaRPr lang="hu-HU"/>
           </a:p>
@@ -672,7 +673,7 @@
           <a:p>
             <a:fld id="{49A1C7AC-5350-4AE7-A316-A33A7FEEB943}" type="datetimeFigureOut">
               <a:rPr lang="hu-HU" smtClean="0"/>
-              <a:t>2026. 10. 01.</a:t>
+              <a:t>2026. 10. 08.</a:t>
             </a:fld>
             <a:endParaRPr lang="hu-HU"/>
           </a:p>
@@ -870,7 +871,7 @@
           <a:p>
             <a:fld id="{49A1C7AC-5350-4AE7-A316-A33A7FEEB943}" type="datetimeFigureOut">
               <a:rPr lang="hu-HU" smtClean="0"/>
-              <a:t>2026. 10. 01.</a:t>
+              <a:t>2026. 10. 08.</a:t>
             </a:fld>
             <a:endParaRPr lang="hu-HU"/>
           </a:p>
@@ -1145,7 +1146,7 @@
           <a:p>
             <a:fld id="{49A1C7AC-5350-4AE7-A316-A33A7FEEB943}" type="datetimeFigureOut">
               <a:rPr lang="hu-HU" smtClean="0"/>
-              <a:t>2026. 10. 01.</a:t>
+              <a:t>2026. 10. 08.</a:t>
             </a:fld>
             <a:endParaRPr lang="hu-HU"/>
           </a:p>
@@ -1410,7 +1411,7 @@
           <a:p>
             <a:fld id="{49A1C7AC-5350-4AE7-A316-A33A7FEEB943}" type="datetimeFigureOut">
               <a:rPr lang="hu-HU" smtClean="0"/>
-              <a:t>2026. 10. 01.</a:t>
+              <a:t>2026. 10. 08.</a:t>
             </a:fld>
             <a:endParaRPr lang="hu-HU"/>
           </a:p>
@@ -1822,7 +1823,7 @@
           <a:p>
             <a:fld id="{49A1C7AC-5350-4AE7-A316-A33A7FEEB943}" type="datetimeFigureOut">
               <a:rPr lang="hu-HU" smtClean="0"/>
-              <a:t>2026. 10. 01.</a:t>
+              <a:t>2026. 10. 08.</a:t>
             </a:fld>
             <a:endParaRPr lang="hu-HU"/>
           </a:p>
@@ -1963,7 +1964,7 @@
           <a:p>
             <a:fld id="{49A1C7AC-5350-4AE7-A316-A33A7FEEB943}" type="datetimeFigureOut">
               <a:rPr lang="hu-HU" smtClean="0"/>
-              <a:t>2026. 10. 01.</a:t>
+              <a:t>2026. 10. 08.</a:t>
             </a:fld>
             <a:endParaRPr lang="hu-HU"/>
           </a:p>
@@ -2076,7 +2077,7 @@
           <a:p>
             <a:fld id="{49A1C7AC-5350-4AE7-A316-A33A7FEEB943}" type="datetimeFigureOut">
               <a:rPr lang="hu-HU" smtClean="0"/>
-              <a:t>2026. 10. 01.</a:t>
+              <a:t>2026. 10. 08.</a:t>
             </a:fld>
             <a:endParaRPr lang="hu-HU"/>
           </a:p>
@@ -2387,7 +2388,7 @@
           <a:p>
             <a:fld id="{49A1C7AC-5350-4AE7-A316-A33A7FEEB943}" type="datetimeFigureOut">
               <a:rPr lang="hu-HU" smtClean="0"/>
-              <a:t>2026. 10. 01.</a:t>
+              <a:t>2026. 10. 08.</a:t>
             </a:fld>
             <a:endParaRPr lang="hu-HU"/>
           </a:p>
@@ -2675,7 +2676,7 @@
           <a:p>
             <a:fld id="{49A1C7AC-5350-4AE7-A316-A33A7FEEB943}" type="datetimeFigureOut">
               <a:rPr lang="hu-HU" smtClean="0"/>
-              <a:t>2026. 10. 01.</a:t>
+              <a:t>2026. 10. 08.</a:t>
             </a:fld>
             <a:endParaRPr lang="hu-HU"/>
           </a:p>
@@ -2919,7 +2920,7 @@
           <a:p>
             <a:fld id="{49A1C7AC-5350-4AE7-A316-A33A7FEEB943}" type="datetimeFigureOut">
               <a:rPr lang="hu-HU" smtClean="0"/>
-              <a:t>2026. 10. 01.</a:t>
+              <a:t>2026. 10. 08.</a:t>
             </a:fld>
             <a:endParaRPr lang="hu-HU"/>
           </a:p>
@@ -3441,115 +3442,94 @@
           </a:effectLst>
         </p:spPr>
       </p:cxnSp>
-      <p:grpSp>
-        <p:nvGrpSpPr>
-          <p:cNvPr id="10" name="Csoportba foglalás 9">
-            <a:extLst>
-              <a:ext uri="{FF2B5EF4-FFF2-40B4-BE49-F238E27FC236}">
-                <a16:creationId xmlns:a16="http://schemas.microsoft.com/office/drawing/2014/main" id="{9454812E-39B1-4A49-AC35-F0BA675B72CE}"/>
-              </a:ext>
-            </a:extLst>
-          </p:cNvPr>
-          <p:cNvGrpSpPr/>
+      <p:sp>
+        <p:nvSpPr>
+          <p:cNvPr id="4" name="Szövegdoboz 3">
+            <a:extLst>
+              <a:ext uri="{FF2B5EF4-FFF2-40B4-BE49-F238E27FC236}">
+                <a16:creationId xmlns:a16="http://schemas.microsoft.com/office/drawing/2014/main" id="{1E1B5824-8B80-44ED-8C0C-77666160309D}"/>
+              </a:ext>
+            </a:extLst>
+          </p:cNvPr>
+          <p:cNvSpPr txBox="1"/>
           <p:nvPr/>
-        </p:nvGrpSpPr>
-        <p:grpSpPr>
+        </p:nvSpPr>
+        <p:spPr>
+          <a:xfrm>
+            <a:off x="2267093" y="1727684"/>
+            <a:ext cx="8161868" cy="1200329"/>
+          </a:xfrm>
+          <a:prstGeom prst="rect">
+            <a:avLst/>
+          </a:prstGeom>
+          <a:noFill/>
+        </p:spPr>
+        <p:txBody>
+          <a:bodyPr wrap="square" rtlCol="0">
+            <a:spAutoFit/>
+          </a:bodyPr>
+          <a:lstStyle/>
+          <a:p>
+            <a:pPr algn="r"/>
+            <a:r>
+              <a:rPr lang="hu-HU" sz="7200" b="1" cap="all" dirty="0">
+                <a:solidFill>
+                  <a:schemeClr val="bg1"/>
+                </a:solidFill>
+                <a:latin typeface="Montserrat ExtraBold" panose="00000900000000000000" pitchFamily="2" charset="-18"/>
+              </a:rPr>
+              <a:t>operátorok</a:t>
+            </a:r>
+          </a:p>
+        </p:txBody>
+      </p:sp>
+      <p:pic>
+        <p:nvPicPr>
+          <p:cNvPr id="7178" name="Picture 10">
+            <a:extLst>
+              <a:ext uri="{FF2B5EF4-FFF2-40B4-BE49-F238E27FC236}">
+                <a16:creationId xmlns:a16="http://schemas.microsoft.com/office/drawing/2014/main" id="{E233B2DC-6FF0-4E00-90E0-35757F286403}"/>
+              </a:ext>
+            </a:extLst>
+          </p:cNvPr>
+          <p:cNvPicPr>
+            <a:picLocks noChangeAspect="1" noChangeArrowheads="1"/>
+          </p:cNvPicPr>
+          <p:nvPr/>
+        </p:nvPicPr>
+        <p:blipFill>
+          <a:blip r:embed="rId2">
+            <a:extLst>
+              <a:ext uri="{28A0092B-C50C-407E-A947-70E740481C1C}">
+                <a14:useLocalDpi xmlns:a14="http://schemas.microsoft.com/office/drawing/2010/main" val="0"/>
+              </a:ext>
+            </a:extLst>
+          </a:blip>
+          <a:srcRect/>
+          <a:stretch>
+            <a:fillRect/>
+          </a:stretch>
+        </p:blipFill>
+        <p:spPr bwMode="auto">
           <a:xfrm>
             <a:off x="1047891" y="935081"/>
-            <a:ext cx="9381070" cy="2785533"/>
-            <a:chOff x="355599" y="1011281"/>
-            <a:chExt cx="9381070" cy="2785533"/>
+            <a:ext cx="2785533" cy="2785533"/>
           </a:xfrm>
-        </p:grpSpPr>
-        <p:sp>
-          <p:nvSpPr>
-            <p:cNvPr id="4" name="Szövegdoboz 3">
-              <a:extLst>
-                <a:ext uri="{FF2B5EF4-FFF2-40B4-BE49-F238E27FC236}">
-                  <a16:creationId xmlns:a16="http://schemas.microsoft.com/office/drawing/2014/main" id="{1E1B5824-8B80-44ED-8C0C-77666160309D}"/>
-                </a:ext>
-              </a:extLst>
-            </p:cNvPr>
-            <p:cNvSpPr txBox="1"/>
-            <p:nvPr/>
-          </p:nvSpPr>
-          <p:spPr>
-            <a:xfrm>
-              <a:off x="1574801" y="1803884"/>
-              <a:ext cx="8161868" cy="1200329"/>
-            </a:xfrm>
-            <a:prstGeom prst="rect">
-              <a:avLst/>
-            </a:prstGeom>
-            <a:noFill/>
-          </p:spPr>
-          <p:txBody>
-            <a:bodyPr wrap="square" rtlCol="0">
-              <a:spAutoFit/>
-            </a:bodyPr>
-            <a:lstStyle/>
-            <a:p>
-              <a:pPr algn="r"/>
-              <a:r>
-                <a:rPr lang="hu-HU" sz="7200" b="1" cap="all" dirty="0">
-                  <a:solidFill>
-                    <a:schemeClr val="bg1"/>
-                  </a:solidFill>
-                  <a:latin typeface="Montserrat ExtraBold" panose="00000900000000000000" pitchFamily="2" charset="-18"/>
-                </a:rPr>
-                <a:t>operátorok</a:t>
-              </a:r>
-            </a:p>
-          </p:txBody>
-        </p:sp>
-        <p:pic>
-          <p:nvPicPr>
-            <p:cNvPr id="7178" name="Picture 10">
-              <a:extLst>
-                <a:ext uri="{FF2B5EF4-FFF2-40B4-BE49-F238E27FC236}">
-                  <a16:creationId xmlns:a16="http://schemas.microsoft.com/office/drawing/2014/main" id="{E233B2DC-6FF0-4E00-90E0-35757F286403}"/>
-                </a:ext>
-              </a:extLst>
-            </p:cNvPr>
-            <p:cNvPicPr>
-              <a:picLocks noChangeAspect="1" noChangeArrowheads="1"/>
-            </p:cNvPicPr>
-            <p:nvPr/>
-          </p:nvPicPr>
-          <p:blipFill>
-            <a:blip r:embed="rId2">
-              <a:extLst>
-                <a:ext uri="{28A0092B-C50C-407E-A947-70E740481C1C}">
-                  <a14:useLocalDpi xmlns:a14="http://schemas.microsoft.com/office/drawing/2010/main" val="0"/>
-                </a:ext>
-              </a:extLst>
-            </a:blip>
-            <a:srcRect/>
-            <a:stretch>
-              <a:fillRect/>
-            </a:stretch>
-          </p:blipFill>
-          <p:spPr bwMode="auto">
-            <a:xfrm>
-              <a:off x="355599" y="1011281"/>
-              <a:ext cx="2785533" cy="2785533"/>
-            </a:xfrm>
-            <a:prstGeom prst="rect">
-              <a:avLst/>
-            </a:prstGeom>
-            <a:noFill/>
-            <a:extLst>
-              <a:ext uri="{909E8E84-426E-40DD-AFC4-6F175D3DCCD1}">
-                <a14:hiddenFill xmlns:a14="http://schemas.microsoft.com/office/drawing/2010/main">
-                  <a:solidFill>
-                    <a:srgbClr val="FFFFFF"/>
-                  </a:solidFill>
-                </a14:hiddenFill>
-              </a:ext>
-            </a:extLst>
-          </p:spPr>
-        </p:pic>
-      </p:grpSp>
+          <a:prstGeom prst="rect">
+            <a:avLst/>
+          </a:prstGeom>
+          <a:noFill/>
+          <a:extLst>
+            <a:ext uri="{909E8E84-426E-40DD-AFC4-6F175D3DCCD1}">
+              <a14:hiddenFill xmlns:a14="http://schemas.microsoft.com/office/drawing/2010/main">
+                <a:solidFill>
+                  <a:srgbClr val="FFFFFF"/>
+                </a:solidFill>
+              </a14:hiddenFill>
+            </a:ext>
+          </a:extLst>
+        </p:spPr>
+      </p:pic>
     </p:spTree>
     <p:extLst>
       <p:ext uri="{BB962C8B-B14F-4D97-AF65-F5344CB8AC3E}">
@@ -3629,7 +3609,278 @@
       </p:sp>
       <p:sp>
         <p:nvSpPr>
+          <p:cNvPr id="17" name="Téglalap: lekerekített 16">
+            <a:extLst>
+              <a:ext uri="{FF2B5EF4-FFF2-40B4-BE49-F238E27FC236}">
+                <a16:creationId xmlns:a16="http://schemas.microsoft.com/office/drawing/2014/main" id="{DA6577BD-9712-46F4-BDB3-4AC43D205B26}"/>
+              </a:ext>
+            </a:extLst>
+          </p:cNvPr>
+          <p:cNvSpPr/>
+          <p:nvPr/>
+        </p:nvSpPr>
+        <p:spPr>
+          <a:xfrm>
+            <a:off x="4147636" y="1790642"/>
+            <a:ext cx="3708400" cy="461665"/>
+          </a:xfrm>
+          <a:prstGeom prst="roundRect">
+            <a:avLst/>
+          </a:prstGeom>
+          <a:solidFill>
+            <a:schemeClr val="bg1">
+              <a:alpha val="53000"/>
+            </a:schemeClr>
+          </a:solidFill>
+          <a:ln>
+            <a:noFill/>
+          </a:ln>
+        </p:spPr>
+        <p:style>
+          <a:lnRef idx="2">
+            <a:schemeClr val="accent1">
+              <a:shade val="50000"/>
+            </a:schemeClr>
+          </a:lnRef>
+          <a:fillRef idx="1">
+            <a:schemeClr val="accent1"/>
+          </a:fillRef>
+          <a:effectRef idx="0">
+            <a:schemeClr val="accent1"/>
+          </a:effectRef>
+          <a:fontRef idx="minor">
+            <a:schemeClr val="lt1"/>
+          </a:fontRef>
+        </p:style>
+        <p:txBody>
+          <a:bodyPr rtlCol="0" anchor="ctr"/>
+          <a:lstStyle/>
+          <a:p>
+            <a:pPr algn="ctr"/>
+            <a:endParaRPr lang="hu-HU" dirty="0"/>
+          </a:p>
+        </p:txBody>
+      </p:sp>
+      <p:sp>
+        <p:nvSpPr>
+          <p:cNvPr id="18" name="Téglalap: lekerekített 17">
+            <a:extLst>
+              <a:ext uri="{FF2B5EF4-FFF2-40B4-BE49-F238E27FC236}">
+                <a16:creationId xmlns:a16="http://schemas.microsoft.com/office/drawing/2014/main" id="{5154C58D-B13D-44D9-94CD-70E492CC8F05}"/>
+              </a:ext>
+            </a:extLst>
+          </p:cNvPr>
+          <p:cNvSpPr/>
+          <p:nvPr/>
+        </p:nvSpPr>
+        <p:spPr>
+          <a:xfrm>
+            <a:off x="4147636" y="2596389"/>
+            <a:ext cx="3708400" cy="461665"/>
+          </a:xfrm>
+          <a:prstGeom prst="roundRect">
+            <a:avLst/>
+          </a:prstGeom>
+          <a:solidFill>
+            <a:schemeClr val="bg1">
+              <a:alpha val="53000"/>
+            </a:schemeClr>
+          </a:solidFill>
+          <a:ln>
+            <a:noFill/>
+          </a:ln>
+        </p:spPr>
+        <p:style>
+          <a:lnRef idx="2">
+            <a:schemeClr val="accent1">
+              <a:shade val="50000"/>
+            </a:schemeClr>
+          </a:lnRef>
+          <a:fillRef idx="1">
+            <a:schemeClr val="accent1"/>
+          </a:fillRef>
+          <a:effectRef idx="0">
+            <a:schemeClr val="accent1"/>
+          </a:effectRef>
+          <a:fontRef idx="minor">
+            <a:schemeClr val="lt1"/>
+          </a:fontRef>
+        </p:style>
+        <p:txBody>
+          <a:bodyPr rtlCol="0" anchor="ctr"/>
+          <a:lstStyle/>
+          <a:p>
+            <a:pPr algn="ctr"/>
+            <a:endParaRPr lang="hu-HU" dirty="0"/>
+          </a:p>
+        </p:txBody>
+      </p:sp>
+      <p:sp>
+        <p:nvSpPr>
+          <p:cNvPr id="19" name="Téglalap: lekerekített 18">
+            <a:extLst>
+              <a:ext uri="{FF2B5EF4-FFF2-40B4-BE49-F238E27FC236}">
+                <a16:creationId xmlns:a16="http://schemas.microsoft.com/office/drawing/2014/main" id="{D77ADE3C-2573-4319-9212-AE48DED75591}"/>
+              </a:ext>
+            </a:extLst>
+          </p:cNvPr>
+          <p:cNvSpPr/>
+          <p:nvPr/>
+        </p:nvSpPr>
+        <p:spPr>
+          <a:xfrm>
+            <a:off x="4147636" y="3399528"/>
+            <a:ext cx="3708400" cy="461665"/>
+          </a:xfrm>
+          <a:prstGeom prst="roundRect">
+            <a:avLst/>
+          </a:prstGeom>
+          <a:solidFill>
+            <a:schemeClr val="bg1">
+              <a:alpha val="53000"/>
+            </a:schemeClr>
+          </a:solidFill>
+          <a:ln>
+            <a:noFill/>
+          </a:ln>
+        </p:spPr>
+        <p:style>
+          <a:lnRef idx="2">
+            <a:schemeClr val="accent1">
+              <a:shade val="50000"/>
+            </a:schemeClr>
+          </a:lnRef>
+          <a:fillRef idx="1">
+            <a:schemeClr val="accent1"/>
+          </a:fillRef>
+          <a:effectRef idx="0">
+            <a:schemeClr val="accent1"/>
+          </a:effectRef>
+          <a:fontRef idx="minor">
+            <a:schemeClr val="lt1"/>
+          </a:fontRef>
+        </p:style>
+        <p:txBody>
+          <a:bodyPr rtlCol="0" anchor="ctr"/>
+          <a:lstStyle/>
+          <a:p>
+            <a:pPr algn="ctr"/>
+            <a:endParaRPr lang="hu-HU" dirty="0"/>
+          </a:p>
+        </p:txBody>
+      </p:sp>
+      <p:sp>
+        <p:nvSpPr>
+          <p:cNvPr id="20" name="Téglalap: lekerekített 19">
+            <a:extLst>
+              <a:ext uri="{FF2B5EF4-FFF2-40B4-BE49-F238E27FC236}">
+                <a16:creationId xmlns:a16="http://schemas.microsoft.com/office/drawing/2014/main" id="{40C28CC3-45EC-484B-B5DC-BB82DF40960E}"/>
+              </a:ext>
+            </a:extLst>
+          </p:cNvPr>
+          <p:cNvSpPr/>
+          <p:nvPr/>
+        </p:nvSpPr>
+        <p:spPr>
+          <a:xfrm>
+            <a:off x="4147636" y="4230156"/>
+            <a:ext cx="3708400" cy="461665"/>
+          </a:xfrm>
+          <a:prstGeom prst="roundRect">
+            <a:avLst/>
+          </a:prstGeom>
+          <a:solidFill>
+            <a:schemeClr val="bg1">
+              <a:alpha val="53000"/>
+            </a:schemeClr>
+          </a:solidFill>
+          <a:ln>
+            <a:noFill/>
+          </a:ln>
+        </p:spPr>
+        <p:style>
+          <a:lnRef idx="2">
+            <a:schemeClr val="accent1">
+              <a:shade val="50000"/>
+            </a:schemeClr>
+          </a:lnRef>
+          <a:fillRef idx="1">
+            <a:schemeClr val="accent1"/>
+          </a:fillRef>
+          <a:effectRef idx="0">
+            <a:schemeClr val="accent1"/>
+          </a:effectRef>
+          <a:fontRef idx="minor">
+            <a:schemeClr val="lt1"/>
+          </a:fontRef>
+        </p:style>
+        <p:txBody>
+          <a:bodyPr rtlCol="0" anchor="ctr"/>
+          <a:lstStyle/>
+          <a:p>
+            <a:pPr algn="ctr"/>
+            <a:endParaRPr lang="hu-HU" dirty="0"/>
+          </a:p>
+        </p:txBody>
+      </p:sp>
+      <p:sp>
+        <p:nvSpPr>
+          <p:cNvPr id="21" name="Téglalap: lekerekített 20">
+            <a:extLst>
+              <a:ext uri="{FF2B5EF4-FFF2-40B4-BE49-F238E27FC236}">
+                <a16:creationId xmlns:a16="http://schemas.microsoft.com/office/drawing/2014/main" id="{B73FF6D3-14B9-4620-8DDF-37BD85CD21B9}"/>
+              </a:ext>
+            </a:extLst>
+          </p:cNvPr>
+          <p:cNvSpPr/>
+          <p:nvPr/>
+        </p:nvSpPr>
+        <p:spPr>
+          <a:xfrm>
+            <a:off x="4147636" y="5060784"/>
+            <a:ext cx="3708400" cy="461665"/>
+          </a:xfrm>
+          <a:prstGeom prst="roundRect">
+            <a:avLst/>
+          </a:prstGeom>
+          <a:solidFill>
+            <a:schemeClr val="bg1">
+              <a:alpha val="53000"/>
+            </a:schemeClr>
+          </a:solidFill>
+          <a:ln>
+            <a:noFill/>
+          </a:ln>
+        </p:spPr>
+        <p:style>
+          <a:lnRef idx="2">
+            <a:schemeClr val="accent1">
+              <a:shade val="50000"/>
+            </a:schemeClr>
+          </a:lnRef>
+          <a:fillRef idx="1">
+            <a:schemeClr val="accent1"/>
+          </a:fillRef>
+          <a:effectRef idx="0">
+            <a:schemeClr val="accent1"/>
+          </a:effectRef>
+          <a:fontRef idx="minor">
+            <a:schemeClr val="lt1"/>
+          </a:fontRef>
+        </p:style>
+        <p:txBody>
+          <a:bodyPr rtlCol="0" anchor="ctr"/>
+          <a:lstStyle/>
+          <a:p>
+            <a:pPr algn="ctr"/>
+            <a:endParaRPr lang="hu-HU" dirty="0"/>
+          </a:p>
+        </p:txBody>
+      </p:sp>
+      <p:sp>
+        <p:nvSpPr>
           <p:cNvPr id="4" name="Szövegdoboz 3">
+            <a:hlinkClick r:id="rId2" action="ppaction://hlinksldjump"/>
             <a:extLst>
               <a:ext uri="{FF2B5EF4-FFF2-40B4-BE49-F238E27FC236}">
                 <a16:creationId xmlns:a16="http://schemas.microsoft.com/office/drawing/2014/main" id="{00C0C786-21D1-4A1A-97C3-2AA01C310425}"/>
@@ -3641,7 +3892,7 @@
         </p:nvSpPr>
         <p:spPr>
           <a:xfrm>
-            <a:off x="609600" y="1875727"/>
+            <a:off x="4953782" y="1790643"/>
             <a:ext cx="2065867" cy="461665"/>
           </a:xfrm>
           <a:prstGeom prst="rect">
@@ -3670,6 +3921,7 @@
       <p:sp>
         <p:nvSpPr>
           <p:cNvPr id="6" name="Szövegdoboz 5">
+            <a:hlinkClick r:id="rId3" action="ppaction://hlinksldjump"/>
             <a:extLst>
               <a:ext uri="{FF2B5EF4-FFF2-40B4-BE49-F238E27FC236}">
                 <a16:creationId xmlns:a16="http://schemas.microsoft.com/office/drawing/2014/main" id="{D8CB13F2-4BB0-4787-9B42-BC5EFDE7A2EB}"/>
@@ -3681,7 +3933,7 @@
         </p:nvSpPr>
         <p:spPr>
           <a:xfrm>
-            <a:off x="609600" y="2660663"/>
+            <a:off x="4275665" y="2603814"/>
             <a:ext cx="3640667" cy="461665"/>
           </a:xfrm>
           <a:prstGeom prst="rect">
@@ -3710,6 +3962,7 @@
       <p:sp>
         <p:nvSpPr>
           <p:cNvPr id="8" name="Szövegdoboz 7">
+            <a:hlinkClick r:id="rId4" action="ppaction://hlinksldjump"/>
             <a:extLst>
               <a:ext uri="{FF2B5EF4-FFF2-40B4-BE49-F238E27FC236}">
                 <a16:creationId xmlns:a16="http://schemas.microsoft.com/office/drawing/2014/main" id="{309134D5-95C3-4EBC-80E6-DD0F19B4ECC3}"/>
@@ -3721,8 +3974,8 @@
         </p:nvSpPr>
         <p:spPr>
           <a:xfrm>
-            <a:off x="609600" y="3445599"/>
-            <a:ext cx="1540933" cy="461665"/>
+            <a:off x="4686298" y="3416985"/>
+            <a:ext cx="2819400" cy="461665"/>
           </a:xfrm>
           <a:prstGeom prst="rect">
             <a:avLst/>
@@ -3742,7 +3995,7 @@
                 </a:solidFill>
                 <a:latin typeface="Montserrat ExtraBold" panose="00000900000000000000" pitchFamily="2" charset="-18"/>
               </a:rPr>
-              <a:t>Relációs</a:t>
+              <a:t>Összehasonlító</a:t>
             </a:r>
           </a:p>
         </p:txBody>
@@ -3750,6 +4003,7 @@
       <p:sp>
         <p:nvSpPr>
           <p:cNvPr id="10" name="Szövegdoboz 9">
+            <a:hlinkClick r:id="rId5" action="ppaction://hlinksldjump"/>
             <a:extLst>
               <a:ext uri="{FF2B5EF4-FFF2-40B4-BE49-F238E27FC236}">
                 <a16:creationId xmlns:a16="http://schemas.microsoft.com/office/drawing/2014/main" id="{1BFB1B70-095A-472A-8C3E-2A31525775CB}"/>
@@ -3761,7 +4015,7 @@
         </p:nvSpPr>
         <p:spPr>
           <a:xfrm>
-            <a:off x="609600" y="4230535"/>
+            <a:off x="5359398" y="4230156"/>
             <a:ext cx="1473200" cy="461665"/>
           </a:xfrm>
           <a:prstGeom prst="rect">
@@ -3790,6 +4044,7 @@
       <p:sp>
         <p:nvSpPr>
           <p:cNvPr id="12" name="Szövegdoboz 11">
+            <a:hlinkClick r:id="rId6" action="ppaction://hlinksldjump"/>
             <a:extLst>
               <a:ext uri="{FF2B5EF4-FFF2-40B4-BE49-F238E27FC236}">
                 <a16:creationId xmlns:a16="http://schemas.microsoft.com/office/drawing/2014/main" id="{AB7E1EFB-2657-4CC3-A071-51F6BBCF689B}"/>
@@ -3801,7 +4056,7 @@
         </p:nvSpPr>
         <p:spPr>
           <a:xfrm>
-            <a:off x="609600" y="5015469"/>
+            <a:off x="5465231" y="5043327"/>
             <a:ext cx="1261533" cy="461665"/>
           </a:xfrm>
           <a:prstGeom prst="rect">
@@ -3842,7 +4097,7 @@
           <p:nvPr/>
         </p:nvPicPr>
         <p:blipFill>
-          <a:blip r:embed="rId2">
+          <a:blip r:embed="rId7">
             <a:extLst>
               <a:ext uri="{28A0092B-C50C-407E-A947-70E740481C1C}">
                 <a14:useLocalDpi xmlns:a14="http://schemas.microsoft.com/office/drawing/2010/main" val="0"/>
@@ -3884,6 +4139,18 @@
   <p:clrMapOvr>
     <a:masterClrMapping/>
   </p:clrMapOvr>
+  <mc:AlternateContent xmlns:mc="http://schemas.openxmlformats.org/markup-compatibility/2006">
+    <mc:Choice xmlns:p159="http://schemas.microsoft.com/office/powerpoint/2015/09/main" Requires="p159">
+      <p:transition xmlns:p14="http://schemas.microsoft.com/office/powerpoint/2010/main" spd="slow" p14:dur="2000">
+        <p159:morph option="byChar"/>
+      </p:transition>
+    </mc:Choice>
+    <mc:Fallback>
+      <p:transition spd="slow">
+        <p:fade/>
+      </p:transition>
+    </mc:Fallback>
+  </mc:AlternateContent>
 </p:sld>
 </file>
 
@@ -4169,10 +4436,11 @@
       </p:sp>
       <p:pic>
         <p:nvPicPr>
-          <p:cNvPr id="18" name="Picture 10">
-            <a:extLst>
-              <a:ext uri="{FF2B5EF4-FFF2-40B4-BE49-F238E27FC236}">
-                <a16:creationId xmlns:a16="http://schemas.microsoft.com/office/drawing/2014/main" id="{A9A7C551-D5DB-4E4E-88FF-1A1AA2DCE0D4}"/>
+          <p:cNvPr id="5" name="Picture 10">
+            <a:hlinkClick r:id="rId2" action="ppaction://hlinksldjump"/>
+            <a:extLst>
+              <a:ext uri="{FF2B5EF4-FFF2-40B4-BE49-F238E27FC236}">
+                <a16:creationId xmlns:a16="http://schemas.microsoft.com/office/drawing/2014/main" id="{B084243A-D909-4E7E-B81E-DB8D37398E18}"/>
               </a:ext>
             </a:extLst>
           </p:cNvPr>
@@ -4182,7 +4450,7 @@
           <p:nvPr/>
         </p:nvPicPr>
         <p:blipFill>
-          <a:blip r:embed="rId2">
+          <a:blip r:embed="rId3">
             <a:extLst>
               <a:ext uri="{28A0092B-C50C-407E-A947-70E740481C1C}">
                 <a14:useLocalDpi xmlns:a14="http://schemas.microsoft.com/office/drawing/2010/main" val="0"/>
@@ -4196,8 +4464,8 @@
         </p:blipFill>
         <p:spPr bwMode="auto">
           <a:xfrm>
-            <a:off x="5217826" y="5384801"/>
-            <a:ext cx="1756347" cy="1756347"/>
+            <a:off x="10785755" y="5700821"/>
+            <a:ext cx="1324810" cy="1324810"/>
           </a:xfrm>
           <a:prstGeom prst="rect">
             <a:avLst/>
@@ -4214,6 +4482,46 @@
           </a:extLst>
         </p:spPr>
       </p:pic>
+      <p:sp>
+        <p:nvSpPr>
+          <p:cNvPr id="2" name="Szövegdoboz 1">
+            <a:extLst>
+              <a:ext uri="{FF2B5EF4-FFF2-40B4-BE49-F238E27FC236}">
+                <a16:creationId xmlns:a16="http://schemas.microsoft.com/office/drawing/2014/main" id="{3D6100EF-8CF4-44FA-8CB8-94B8844CACC8}"/>
+              </a:ext>
+            </a:extLst>
+          </p:cNvPr>
+          <p:cNvSpPr txBox="1"/>
+          <p:nvPr/>
+        </p:nvSpPr>
+        <p:spPr>
+          <a:xfrm>
+            <a:off x="11172079" y="5700821"/>
+            <a:ext cx="552162" cy="230832"/>
+          </a:xfrm>
+          <a:prstGeom prst="rect">
+            <a:avLst/>
+          </a:prstGeom>
+          <a:noFill/>
+        </p:spPr>
+        <p:txBody>
+          <a:bodyPr wrap="square" rtlCol="0">
+            <a:spAutoFit/>
+          </a:bodyPr>
+          <a:lstStyle/>
+          <a:p>
+            <a:r>
+              <a:rPr lang="hu-HU" sz="900" dirty="0">
+                <a:solidFill>
+                  <a:schemeClr val="bg1"/>
+                </a:solidFill>
+                <a:latin typeface="Montserrat ExtraBold" panose="00000900000000000000" pitchFamily="2" charset="-18"/>
+              </a:rPr>
+              <a:t>BACK</a:t>
+            </a:r>
+          </a:p>
+        </p:txBody>
+      </p:sp>
     </p:spTree>
     <p:extLst>
       <p:ext uri="{BB962C8B-B14F-4D97-AF65-F5344CB8AC3E}">
@@ -4224,6 +4532,18 @@
   <p:clrMapOvr>
     <a:masterClrMapping/>
   </p:clrMapOvr>
+  <mc:AlternateContent xmlns:mc="http://schemas.openxmlformats.org/markup-compatibility/2006">
+    <mc:Choice xmlns:p159="http://schemas.microsoft.com/office/powerpoint/2015/09/main" Requires="p159">
+      <p:transition xmlns:p14="http://schemas.microsoft.com/office/powerpoint/2010/main" spd="slow" p14:dur="2000">
+        <p159:morph option="byChar"/>
+      </p:transition>
+    </mc:Choice>
+    <mc:Fallback>
+      <p:transition spd="slow">
+        <p:fade/>
+      </p:transition>
+    </mc:Fallback>
+  </mc:AlternateContent>
 </p:sld>
 </file>
 
@@ -4585,7 +4905,7 @@
               <a:tabLst/>
             </a:pPr>
             <a:r>
-              <a:rPr kumimoji="0" lang="hu-HU" altLang="hu-HU" sz="4000" b="0" i="0" u="none" strike="noStrike" cap="none" normalizeH="0" baseline="0" dirty="0">
+              <a:rPr kumimoji="0" lang="hu-HU" altLang="hu-HU" sz="4000" i="0" u="none" strike="noStrike" cap="none" normalizeH="0" baseline="0" dirty="0">
                 <a:ln>
                   <a:noFill/>
                 </a:ln>
@@ -4636,6 +4956,94 @@
           </a:prstGeom>
         </p:spPr>
       </p:pic>
+      <p:pic>
+        <p:nvPicPr>
+          <p:cNvPr id="6" name="Picture 10">
+            <a:hlinkClick r:id="rId3" action="ppaction://hlinksldjump"/>
+            <a:extLst>
+              <a:ext uri="{FF2B5EF4-FFF2-40B4-BE49-F238E27FC236}">
+                <a16:creationId xmlns:a16="http://schemas.microsoft.com/office/drawing/2014/main" id="{8DB851CE-8F01-4424-80B1-397FBCF11550}"/>
+              </a:ext>
+            </a:extLst>
+          </p:cNvPr>
+          <p:cNvPicPr>
+            <a:picLocks noChangeAspect="1" noChangeArrowheads="1"/>
+          </p:cNvPicPr>
+          <p:nvPr/>
+        </p:nvPicPr>
+        <p:blipFill>
+          <a:blip r:embed="rId4">
+            <a:extLst>
+              <a:ext uri="{28A0092B-C50C-407E-A947-70E740481C1C}">
+                <a14:useLocalDpi xmlns:a14="http://schemas.microsoft.com/office/drawing/2010/main" val="0"/>
+              </a:ext>
+            </a:extLst>
+          </a:blip>
+          <a:srcRect/>
+          <a:stretch>
+            <a:fillRect/>
+          </a:stretch>
+        </p:blipFill>
+        <p:spPr bwMode="auto">
+          <a:xfrm>
+            <a:off x="10785755" y="5700821"/>
+            <a:ext cx="1324810" cy="1324810"/>
+          </a:xfrm>
+          <a:prstGeom prst="rect">
+            <a:avLst/>
+          </a:prstGeom>
+          <a:noFill/>
+          <a:extLst>
+            <a:ext uri="{909E8E84-426E-40DD-AFC4-6F175D3DCCD1}">
+              <a14:hiddenFill xmlns:a14="http://schemas.microsoft.com/office/drawing/2010/main">
+                <a:solidFill>
+                  <a:srgbClr val="FFFFFF"/>
+                </a:solidFill>
+              </a14:hiddenFill>
+            </a:ext>
+          </a:extLst>
+        </p:spPr>
+      </p:pic>
+      <p:sp>
+        <p:nvSpPr>
+          <p:cNvPr id="9" name="Szövegdoboz 8">
+            <a:extLst>
+              <a:ext uri="{FF2B5EF4-FFF2-40B4-BE49-F238E27FC236}">
+                <a16:creationId xmlns:a16="http://schemas.microsoft.com/office/drawing/2014/main" id="{03318617-211C-4B39-A65A-49E803E2FECB}"/>
+              </a:ext>
+            </a:extLst>
+          </p:cNvPr>
+          <p:cNvSpPr txBox="1"/>
+          <p:nvPr/>
+        </p:nvSpPr>
+        <p:spPr>
+          <a:xfrm>
+            <a:off x="11172079" y="5700821"/>
+            <a:ext cx="552162" cy="230832"/>
+          </a:xfrm>
+          <a:prstGeom prst="rect">
+            <a:avLst/>
+          </a:prstGeom>
+          <a:noFill/>
+        </p:spPr>
+        <p:txBody>
+          <a:bodyPr wrap="square" rtlCol="0">
+            <a:spAutoFit/>
+          </a:bodyPr>
+          <a:lstStyle/>
+          <a:p>
+            <a:r>
+              <a:rPr lang="hu-HU" sz="900" dirty="0">
+                <a:solidFill>
+                  <a:schemeClr val="bg1"/>
+                </a:solidFill>
+                <a:latin typeface="Montserrat ExtraBold" panose="00000900000000000000" pitchFamily="2" charset="-18"/>
+              </a:rPr>
+              <a:t>BACK</a:t>
+            </a:r>
+          </a:p>
+        </p:txBody>
+      </p:sp>
     </p:spTree>
     <p:extLst>
       <p:ext uri="{BB962C8B-B14F-4D97-AF65-F5344CB8AC3E}">
@@ -4646,6 +5054,18 @@
   <p:clrMapOvr>
     <a:masterClrMapping/>
   </p:clrMapOvr>
+  <mc:AlternateContent xmlns:mc="http://schemas.openxmlformats.org/markup-compatibility/2006">
+    <mc:Choice xmlns:p159="http://schemas.microsoft.com/office/powerpoint/2015/09/main" Requires="p159">
+      <p:transition xmlns:p14="http://schemas.microsoft.com/office/powerpoint/2010/main" spd="slow" p14:dur="2000">
+        <p159:morph option="byChar"/>
+      </p:transition>
+    </mc:Choice>
+    <mc:Fallback>
+      <p:transition spd="slow">
+        <p:fade/>
+      </p:transition>
+    </mc:Fallback>
+  </mc:AlternateContent>
 </p:sld>
 </file>
 
@@ -4671,7 +5091,7 @@
           <p:cNvPr id="2" name="Rectangle 1">
             <a:extLst>
               <a:ext uri="{FF2B5EF4-FFF2-40B4-BE49-F238E27FC236}">
-                <a16:creationId xmlns:a16="http://schemas.microsoft.com/office/drawing/2014/main" id="{904A3B1A-4449-4429-8268-69CA3F6A0F7B}"/>
+                <a16:creationId xmlns:a16="http://schemas.microsoft.com/office/drawing/2014/main" id="{EFC505C7-2B43-4BEC-AB26-C94F7BAFDB90}"/>
               </a:ext>
             </a:extLst>
           </p:cNvPr>
@@ -4682,8 +5102,8 @@
         </p:nvSpPr>
         <p:spPr bwMode="auto">
           <a:xfrm>
-            <a:off x="283074" y="2463667"/>
-            <a:ext cx="10110159" cy="2862322"/>
+            <a:off x="25400" y="2577574"/>
+            <a:ext cx="6019800" cy="3785652"/>
           </a:xfrm>
           <a:prstGeom prst="rect">
             <a:avLst/>
@@ -4748,7 +5168,7 @@
               <a:tabLst/>
             </a:pPr>
             <a:r>
-              <a:rPr kumimoji="0" lang="hu-HU" altLang="hu-HU" sz="2000" b="0" i="0" u="none" strike="noStrike" cap="none" normalizeH="0" baseline="0" dirty="0">
+              <a:rPr kumimoji="0" lang="hu-HU" altLang="hu-HU" sz="2400" b="0" i="0" u="none" strike="noStrike" cap="none" normalizeH="0" baseline="0" dirty="0">
                 <a:ln>
                   <a:noFill/>
                 </a:ln>
@@ -4758,7 +5178,7 @@
                 <a:effectLst/>
                 <a:latin typeface="Montserrat ExtraBold" panose="00000900000000000000" pitchFamily="2" charset="-18"/>
               </a:rPr>
-              <a:t>Az összehasonlító operátorok</a:t>
+              <a:t>Az értékadó operátorokkal értéket adhatunk egy változónak, illetve egy meglévő értéket módosíthatunk.</a:t>
             </a:r>
           </a:p>
           <a:p>
@@ -4779,7 +5199,7 @@
               <a:tabLst/>
             </a:pPr>
             <a:r>
-              <a:rPr kumimoji="0" lang="hu-HU" altLang="hu-HU" sz="2000" b="0" i="0" u="none" strike="noStrike" cap="none" normalizeH="0" baseline="0" dirty="0">
+              <a:rPr kumimoji="0" lang="hu-HU" altLang="hu-HU" sz="2400" b="0" i="0" u="none" strike="noStrike" cap="none" normalizeH="0" baseline="0" dirty="0">
                 <a:ln>
                   <a:noFill/>
                 </a:ln>
@@ -4789,9 +5209,163 @@
                 <a:effectLst/>
                 <a:latin typeface="Montserrat ExtraBold" panose="00000900000000000000" pitchFamily="2" charset="-18"/>
               </a:rPr>
-              <a:t>két értéket hasonlítanak össze.</a:t>
-            </a:r>
-          </a:p>
+              <a:t>= Értékadás</a:t>
+            </a:r>
+            <a:br>
+              <a:rPr kumimoji="0" lang="hu-HU" altLang="hu-HU" sz="2400" b="0" i="0" u="none" strike="noStrike" cap="none" normalizeH="0" baseline="0" dirty="0">
+                <a:ln>
+                  <a:noFill/>
+                </a:ln>
+                <a:solidFill>
+                  <a:srgbClr val="002060"/>
+                </a:solidFill>
+                <a:effectLst/>
+                <a:latin typeface="Montserrat ExtraBold" panose="00000900000000000000" pitchFamily="2" charset="-18"/>
+              </a:rPr>
+            </a:br>
+            <a:r>
+              <a:rPr kumimoji="0" lang="hu-HU" altLang="hu-HU" sz="2400" b="0" i="0" u="none" strike="noStrike" cap="none" normalizeH="0" baseline="0" dirty="0">
+                <a:ln>
+                  <a:noFill/>
+                </a:ln>
+                <a:solidFill>
+                  <a:srgbClr val="002060"/>
+                </a:solidFill>
+                <a:effectLst/>
+                <a:latin typeface="Montserrat ExtraBold" panose="00000900000000000000" pitchFamily="2" charset="-18"/>
+              </a:rPr>
+              <a:t>+= Hozzáadás és értékadás</a:t>
+            </a:r>
+            <a:br>
+              <a:rPr kumimoji="0" lang="hu-HU" altLang="hu-HU" sz="2400" b="0" i="0" u="none" strike="noStrike" cap="none" normalizeH="0" baseline="0" dirty="0">
+                <a:ln>
+                  <a:noFill/>
+                </a:ln>
+                <a:solidFill>
+                  <a:srgbClr val="002060"/>
+                </a:solidFill>
+                <a:effectLst/>
+                <a:latin typeface="Montserrat ExtraBold" panose="00000900000000000000" pitchFamily="2" charset="-18"/>
+              </a:rPr>
+            </a:br>
+            <a:r>
+              <a:rPr kumimoji="0" lang="hu-HU" altLang="hu-HU" sz="2400" b="0" i="0" u="none" strike="noStrike" cap="none" normalizeH="0" baseline="0" dirty="0">
+                <a:ln>
+                  <a:noFill/>
+                </a:ln>
+                <a:solidFill>
+                  <a:srgbClr val="002060"/>
+                </a:solidFill>
+                <a:effectLst/>
+                <a:latin typeface="Montserrat ExtraBold" panose="00000900000000000000" pitchFamily="2" charset="-18"/>
+              </a:rPr>
+              <a:t>-= Kivonás és értékadás</a:t>
+            </a:r>
+            <a:br>
+              <a:rPr kumimoji="0" lang="hu-HU" altLang="hu-HU" sz="2400" b="0" i="0" u="none" strike="noStrike" cap="none" normalizeH="0" baseline="0" dirty="0">
+                <a:ln>
+                  <a:noFill/>
+                </a:ln>
+                <a:solidFill>
+                  <a:srgbClr val="002060"/>
+                </a:solidFill>
+                <a:effectLst/>
+                <a:latin typeface="Montserrat ExtraBold" panose="00000900000000000000" pitchFamily="2" charset="-18"/>
+              </a:rPr>
+            </a:br>
+            <a:r>
+              <a:rPr kumimoji="0" lang="hu-HU" altLang="hu-HU" sz="2400" b="0" i="0" u="none" strike="noStrike" cap="none" normalizeH="0" baseline="0" dirty="0">
+                <a:ln>
+                  <a:noFill/>
+                </a:ln>
+                <a:solidFill>
+                  <a:srgbClr val="002060"/>
+                </a:solidFill>
+                <a:effectLst/>
+                <a:latin typeface="Montserrat ExtraBold" panose="00000900000000000000" pitchFamily="2" charset="-18"/>
+              </a:rPr>
+              <a:t>*= Szorzás és értékadás</a:t>
+            </a:r>
+            <a:br>
+              <a:rPr kumimoji="0" lang="hu-HU" altLang="hu-HU" sz="2400" b="0" i="0" u="none" strike="noStrike" cap="none" normalizeH="0" baseline="0" dirty="0">
+                <a:ln>
+                  <a:noFill/>
+                </a:ln>
+                <a:solidFill>
+                  <a:srgbClr val="002060"/>
+                </a:solidFill>
+                <a:effectLst/>
+                <a:latin typeface="Montserrat ExtraBold" panose="00000900000000000000" pitchFamily="2" charset="-18"/>
+              </a:rPr>
+            </a:br>
+            <a:r>
+              <a:rPr kumimoji="0" lang="hu-HU" altLang="hu-HU" sz="2400" b="0" i="0" u="none" strike="noStrike" cap="none" normalizeH="0" baseline="0" dirty="0">
+                <a:ln>
+                  <a:noFill/>
+                </a:ln>
+                <a:solidFill>
+                  <a:srgbClr val="002060"/>
+                </a:solidFill>
+                <a:effectLst/>
+                <a:latin typeface="Montserrat ExtraBold" panose="00000900000000000000" pitchFamily="2" charset="-18"/>
+              </a:rPr>
+              <a:t>/= Osztás és értékadás</a:t>
+            </a:r>
+            <a:br>
+              <a:rPr kumimoji="0" lang="hu-HU" altLang="hu-HU" sz="2400" b="0" i="0" u="none" strike="noStrike" cap="none" normalizeH="0" baseline="0" dirty="0">
+                <a:ln>
+                  <a:noFill/>
+                </a:ln>
+                <a:solidFill>
+                  <a:srgbClr val="002060"/>
+                </a:solidFill>
+                <a:effectLst/>
+                <a:latin typeface="Montserrat ExtraBold" panose="00000900000000000000" pitchFamily="2" charset="-18"/>
+              </a:rPr>
+            </a:br>
+            <a:r>
+              <a:rPr kumimoji="0" lang="hu-HU" altLang="hu-HU" sz="2400" b="0" i="0" u="none" strike="noStrike" cap="none" normalizeH="0" baseline="0" dirty="0">
+                <a:ln>
+                  <a:noFill/>
+                </a:ln>
+                <a:solidFill>
+                  <a:srgbClr val="002060"/>
+                </a:solidFill>
+                <a:effectLst/>
+                <a:latin typeface="Montserrat ExtraBold" panose="00000900000000000000" pitchFamily="2" charset="-18"/>
+              </a:rPr>
+              <a:t>%= Maradékos osztás és értékadás</a:t>
+            </a:r>
+          </a:p>
+        </p:txBody>
+      </p:sp>
+      <p:sp>
+        <p:nvSpPr>
+          <p:cNvPr id="4" name="Szövegdoboz 3">
+            <a:extLst>
+              <a:ext uri="{FF2B5EF4-FFF2-40B4-BE49-F238E27FC236}">
+                <a16:creationId xmlns:a16="http://schemas.microsoft.com/office/drawing/2014/main" id="{8A77F13C-0235-49AF-88A5-20D76875779B}"/>
+              </a:ext>
+            </a:extLst>
+          </p:cNvPr>
+          <p:cNvSpPr txBox="1"/>
+          <p:nvPr/>
+        </p:nvSpPr>
+        <p:spPr>
+          <a:xfrm>
+            <a:off x="2624667" y="272533"/>
+            <a:ext cx="7442200" cy="707886"/>
+          </a:xfrm>
+          <a:prstGeom prst="rect">
+            <a:avLst/>
+          </a:prstGeom>
+          <a:noFill/>
+        </p:spPr>
+        <p:txBody>
+          <a:bodyPr wrap="square">
+            <a:spAutoFit/>
+          </a:bodyPr>
+          <a:lstStyle/>
           <a:p>
             <a:pPr marL="0" marR="0" lvl="0" indent="0" algn="l" defTabSz="914400" rtl="0" eaLnBrk="0" fontAlgn="base" latinLnBrk="0" hangingPunct="0">
               <a:lnSpc>
@@ -4810,215 +5384,105 @@
               <a:tabLst/>
             </a:pPr>
             <a:r>
-              <a:rPr kumimoji="0" lang="hu-HU" altLang="hu-HU" sz="2000" b="0" i="0" u="none" strike="noStrike" cap="none" normalizeH="0" baseline="0" dirty="0">
+              <a:rPr kumimoji="0" lang="hu-HU" altLang="hu-HU" sz="4000" b="0" i="0" u="none" strike="noStrike" cap="none" normalizeH="0" baseline="0" dirty="0">
                 <a:ln>
                   <a:noFill/>
                 </a:ln>
                 <a:solidFill>
-                  <a:srgbClr val="002060"/>
+                  <a:schemeClr val="bg1"/>
                 </a:solidFill>
                 <a:effectLst/>
                 <a:latin typeface="Montserrat ExtraBold" panose="00000900000000000000" pitchFamily="2" charset="-18"/>
               </a:rPr>
-              <a:t>Az eredmény mindig </a:t>
-            </a:r>
-            <a:r>
-              <a:rPr kumimoji="0" lang="hu-HU" altLang="hu-HU" sz="2000" b="0" i="0" u="none" strike="noStrike" cap="none" normalizeH="0" baseline="0" dirty="0" err="1">
-                <a:ln>
-                  <a:noFill/>
-                </a:ln>
-                <a:solidFill>
-                  <a:srgbClr val="002060"/>
-                </a:solidFill>
-                <a:effectLst/>
-                <a:latin typeface="Montserrat ExtraBold" panose="00000900000000000000" pitchFamily="2" charset="-18"/>
-              </a:rPr>
-              <a:t>true</a:t>
-            </a:r>
-            <a:r>
-              <a:rPr kumimoji="0" lang="hu-HU" altLang="hu-HU" sz="2000" b="0" i="0" u="none" strike="noStrike" cap="none" normalizeH="0" baseline="0" dirty="0">
-                <a:ln>
-                  <a:noFill/>
-                </a:ln>
-                <a:solidFill>
-                  <a:srgbClr val="002060"/>
-                </a:solidFill>
-                <a:effectLst/>
-                <a:latin typeface="Montserrat ExtraBold" panose="00000900000000000000" pitchFamily="2" charset="-18"/>
-              </a:rPr>
-              <a:t> vagy false.</a:t>
-            </a:r>
-          </a:p>
-          <a:p>
-            <a:pPr marL="0" marR="0" lvl="0" indent="0" algn="l" defTabSz="914400" rtl="0" eaLnBrk="0" fontAlgn="base" latinLnBrk="0" hangingPunct="0">
-              <a:lnSpc>
-                <a:spcPct val="100000"/>
-              </a:lnSpc>
-              <a:spcBef>
-                <a:spcPct val="0"/>
-              </a:spcBef>
-              <a:spcAft>
-                <a:spcPct val="0"/>
-              </a:spcAft>
-              <a:buClrTx/>
-              <a:buSzTx/>
-              <a:buFontTx/>
-              <a:buNone/>
-              <a:tabLst/>
-            </a:pPr>
-            <a:r>
-              <a:rPr kumimoji="0" lang="hu-HU" altLang="hu-HU" sz="2000" b="0" i="0" u="none" strike="noStrike" cap="none" normalizeH="0" baseline="0" dirty="0">
-                <a:ln>
-                  <a:noFill/>
-                </a:ln>
-                <a:solidFill>
-                  <a:srgbClr val="002060"/>
-                </a:solidFill>
-                <a:effectLst/>
-                <a:latin typeface="Montserrat ExtraBold" panose="00000900000000000000" pitchFamily="2" charset="-18"/>
-              </a:rPr>
-              <a:t>== Egyenlő</a:t>
-            </a:r>
-            <a:br>
-              <a:rPr kumimoji="0" lang="hu-HU" altLang="hu-HU" sz="2000" b="0" i="0" u="none" strike="noStrike" cap="none" normalizeH="0" baseline="0" dirty="0">
-                <a:ln>
-                  <a:noFill/>
-                </a:ln>
-                <a:solidFill>
-                  <a:srgbClr val="002060"/>
-                </a:solidFill>
-                <a:effectLst/>
-                <a:latin typeface="Montserrat ExtraBold" panose="00000900000000000000" pitchFamily="2" charset="-18"/>
-              </a:rPr>
-            </a:br>
-            <a:r>
-              <a:rPr kumimoji="0" lang="hu-HU" altLang="hu-HU" sz="2000" b="0" i="0" u="none" strike="noStrike" cap="none" normalizeH="0" baseline="0" dirty="0">
-                <a:ln>
-                  <a:noFill/>
-                </a:ln>
-                <a:solidFill>
-                  <a:srgbClr val="002060"/>
-                </a:solidFill>
-                <a:effectLst/>
-                <a:latin typeface="Montserrat ExtraBold" panose="00000900000000000000" pitchFamily="2" charset="-18"/>
-              </a:rPr>
-              <a:t>!= Nem egyenlő</a:t>
-            </a:r>
-          </a:p>
-          <a:p>
-            <a:pPr marL="0" marR="0" lvl="0" indent="0" algn="l" defTabSz="914400" rtl="0" eaLnBrk="0" fontAlgn="base" latinLnBrk="0" hangingPunct="0">
-              <a:lnSpc>
-                <a:spcPct val="100000"/>
-              </a:lnSpc>
-              <a:spcBef>
-                <a:spcPct val="0"/>
-              </a:spcBef>
-              <a:spcAft>
-                <a:spcPct val="0"/>
-              </a:spcAft>
-              <a:buClrTx/>
-              <a:buSzTx/>
-              <a:buFontTx/>
-              <a:buNone/>
-              <a:tabLst/>
-            </a:pPr>
-            <a:r>
-              <a:rPr kumimoji="0" lang="hu-HU" altLang="hu-HU" sz="2000" b="0" i="0" u="none" strike="noStrike" cap="none" normalizeH="0" baseline="0" dirty="0">
-                <a:ln>
-                  <a:noFill/>
-                </a:ln>
-                <a:solidFill>
-                  <a:srgbClr val="002060"/>
-                </a:solidFill>
-                <a:effectLst/>
-                <a:latin typeface="Montserrat ExtraBold" panose="00000900000000000000" pitchFamily="2" charset="-18"/>
-              </a:rPr>
-              <a:t>Nagyobb</a:t>
-            </a:r>
-            <a:br>
-              <a:rPr kumimoji="0" lang="hu-HU" altLang="hu-HU" sz="2000" b="0" i="0" u="none" strike="noStrike" cap="none" normalizeH="0" baseline="0" dirty="0">
-                <a:ln>
-                  <a:noFill/>
-                </a:ln>
-                <a:solidFill>
-                  <a:srgbClr val="002060"/>
-                </a:solidFill>
-                <a:effectLst/>
-                <a:latin typeface="Montserrat ExtraBold" panose="00000900000000000000" pitchFamily="2" charset="-18"/>
-              </a:rPr>
-            </a:br>
-            <a:r>
-              <a:rPr kumimoji="0" lang="hu-HU" altLang="hu-HU" sz="2000" b="0" i="0" u="none" strike="noStrike" cap="none" normalizeH="0" baseline="0" dirty="0">
-                <a:ln>
-                  <a:noFill/>
-                </a:ln>
-                <a:solidFill>
-                  <a:srgbClr val="002060"/>
-                </a:solidFill>
-                <a:effectLst/>
-                <a:latin typeface="Montserrat ExtraBold" panose="00000900000000000000" pitchFamily="2" charset="-18"/>
-              </a:rPr>
-              <a:t>&lt; Kisebb</a:t>
-            </a:r>
-            <a:br>
-              <a:rPr kumimoji="0" lang="hu-HU" altLang="hu-HU" sz="2000" b="0" i="0" u="none" strike="noStrike" cap="none" normalizeH="0" baseline="0" dirty="0">
-                <a:ln>
-                  <a:noFill/>
-                </a:ln>
-                <a:solidFill>
-                  <a:srgbClr val="002060"/>
-                </a:solidFill>
-                <a:effectLst/>
-                <a:latin typeface="Montserrat ExtraBold" panose="00000900000000000000" pitchFamily="2" charset="-18"/>
-              </a:rPr>
-            </a:br>
-            <a:r>
-              <a:rPr kumimoji="0" lang="hu-HU" altLang="hu-HU" sz="2000" b="0" i="0" u="none" strike="noStrike" cap="none" normalizeH="0" baseline="0" dirty="0">
-                <a:ln>
-                  <a:noFill/>
-                </a:ln>
-                <a:solidFill>
-                  <a:srgbClr val="002060"/>
-                </a:solidFill>
-                <a:effectLst/>
-                <a:latin typeface="Montserrat ExtraBold" panose="00000900000000000000" pitchFamily="2" charset="-18"/>
-              </a:rPr>
-              <a:t>= Nagyobb vagy egyenlő</a:t>
-            </a:r>
-            <a:br>
-              <a:rPr kumimoji="0" lang="hu-HU" altLang="hu-HU" sz="2000" b="0" i="0" u="none" strike="noStrike" cap="none" normalizeH="0" baseline="0" dirty="0">
-                <a:ln>
-                  <a:noFill/>
-                </a:ln>
-                <a:solidFill>
-                  <a:srgbClr val="002060"/>
-                </a:solidFill>
-                <a:effectLst/>
-                <a:latin typeface="Montserrat ExtraBold" panose="00000900000000000000" pitchFamily="2" charset="-18"/>
-              </a:rPr>
-            </a:br>
-            <a:r>
-              <a:rPr kumimoji="0" lang="hu-HU" altLang="hu-HU" sz="2000" b="0" i="0" u="none" strike="noStrike" cap="none" normalizeH="0" baseline="0" dirty="0">
-                <a:ln>
-                  <a:noFill/>
-                </a:ln>
-                <a:solidFill>
-                  <a:srgbClr val="002060"/>
-                </a:solidFill>
-                <a:effectLst/>
-                <a:latin typeface="Montserrat ExtraBold" panose="00000900000000000000" pitchFamily="2" charset="-18"/>
-              </a:rPr>
-              <a:t>&lt;= Kisebb vagy egyenlő</a:t>
-            </a:r>
-          </a:p>
-        </p:txBody>
-      </p:sp>
-      <p:sp>
-        <p:nvSpPr>
-          <p:cNvPr id="4" name="Szövegdoboz 3">
-            <a:extLst>
-              <a:ext uri="{FF2B5EF4-FFF2-40B4-BE49-F238E27FC236}">
-                <a16:creationId xmlns:a16="http://schemas.microsoft.com/office/drawing/2014/main" id="{5DEE8835-BB6A-425F-9CE4-AA5C0007C7FF}"/>
+              <a:t>ÉRTÉKADÓ OPERÁTOROK</a:t>
+            </a:r>
+          </a:p>
+        </p:txBody>
+      </p:sp>
+      <p:pic>
+        <p:nvPicPr>
+          <p:cNvPr id="6" name="Kép 5">
+            <a:extLst>
+              <a:ext uri="{FF2B5EF4-FFF2-40B4-BE49-F238E27FC236}">
+                <a16:creationId xmlns:a16="http://schemas.microsoft.com/office/drawing/2014/main" id="{FD12ADBC-D042-4B64-ACEC-81C5BDA1B55B}"/>
+              </a:ext>
+            </a:extLst>
+          </p:cNvPr>
+          <p:cNvPicPr>
+            <a:picLocks noChangeAspect="1"/>
+          </p:cNvPicPr>
+          <p:nvPr/>
+        </p:nvPicPr>
+        <p:blipFill>
+          <a:blip r:embed="rId2"/>
+          <a:stretch>
+            <a:fillRect/>
+          </a:stretch>
+        </p:blipFill>
+        <p:spPr>
+          <a:xfrm>
+            <a:off x="5626602" y="2116666"/>
+            <a:ext cx="6905094" cy="4368800"/>
+          </a:xfrm>
+          <a:prstGeom prst="rect">
+            <a:avLst/>
+          </a:prstGeom>
+        </p:spPr>
+      </p:pic>
+      <p:pic>
+        <p:nvPicPr>
+          <p:cNvPr id="7" name="Picture 10">
+            <a:hlinkClick r:id="rId3" action="ppaction://hlinksldjump"/>
+            <a:extLst>
+              <a:ext uri="{FF2B5EF4-FFF2-40B4-BE49-F238E27FC236}">
+                <a16:creationId xmlns:a16="http://schemas.microsoft.com/office/drawing/2014/main" id="{B2EB658B-8679-4944-9A5A-B2CD23CBCF56}"/>
+              </a:ext>
+            </a:extLst>
+          </p:cNvPr>
+          <p:cNvPicPr>
+            <a:picLocks noChangeAspect="1" noChangeArrowheads="1"/>
+          </p:cNvPicPr>
+          <p:nvPr/>
+        </p:nvPicPr>
+        <p:blipFill>
+          <a:blip r:embed="rId4">
+            <a:extLst>
+              <a:ext uri="{28A0092B-C50C-407E-A947-70E740481C1C}">
+                <a14:useLocalDpi xmlns:a14="http://schemas.microsoft.com/office/drawing/2010/main" val="0"/>
+              </a:ext>
+            </a:extLst>
+          </a:blip>
+          <a:srcRect/>
+          <a:stretch>
+            <a:fillRect/>
+          </a:stretch>
+        </p:blipFill>
+        <p:spPr bwMode="auto">
+          <a:xfrm>
+            <a:off x="10785755" y="5700821"/>
+            <a:ext cx="1324810" cy="1324810"/>
+          </a:xfrm>
+          <a:prstGeom prst="rect">
+            <a:avLst/>
+          </a:prstGeom>
+          <a:noFill/>
+          <a:extLst>
+            <a:ext uri="{909E8E84-426E-40DD-AFC4-6F175D3DCCD1}">
+              <a14:hiddenFill xmlns:a14="http://schemas.microsoft.com/office/drawing/2010/main">
+                <a:solidFill>
+                  <a:srgbClr val="FFFFFF"/>
+                </a:solidFill>
+              </a14:hiddenFill>
+            </a:ext>
+          </a:extLst>
+        </p:spPr>
+      </p:pic>
+      <p:sp>
+        <p:nvSpPr>
+          <p:cNvPr id="8" name="Szövegdoboz 7">
+            <a:extLst>
+              <a:ext uri="{FF2B5EF4-FFF2-40B4-BE49-F238E27FC236}">
+                <a16:creationId xmlns:a16="http://schemas.microsoft.com/office/drawing/2014/main" id="{3E1872DD-B166-4CA0-8CF5-0E5030914920}"/>
               </a:ext>
             </a:extLst>
           </p:cNvPr>
@@ -5027,8 +5491,8 @@
         </p:nvSpPr>
         <p:spPr>
           <a:xfrm>
-            <a:off x="3433233" y="196334"/>
-            <a:ext cx="5325534" cy="1323439"/>
+            <a:off x="11172079" y="5700821"/>
+            <a:ext cx="552162" cy="230832"/>
           </a:xfrm>
           <a:prstGeom prst="rect">
             <a:avLst/>
@@ -5036,89 +5500,45 @@
           <a:noFill/>
         </p:spPr>
         <p:txBody>
-          <a:bodyPr wrap="square">
+          <a:bodyPr wrap="square" rtlCol="0">
             <a:spAutoFit/>
           </a:bodyPr>
           <a:lstStyle/>
           <a:p>
-            <a:pPr marL="0" marR="0" lvl="0" indent="0" algn="ctr" defTabSz="914400" rtl="0" eaLnBrk="0" fontAlgn="base" latinLnBrk="0" hangingPunct="0">
-              <a:lnSpc>
-                <a:spcPct val="100000"/>
-              </a:lnSpc>
-              <a:spcBef>
-                <a:spcPct val="0"/>
-              </a:spcBef>
-              <a:spcAft>
-                <a:spcPct val="0"/>
-              </a:spcAft>
-              <a:buClrTx/>
-              <a:buSzTx/>
-              <a:buFontTx/>
-              <a:buNone/>
-              <a:tabLst/>
-            </a:pPr>
-            <a:r>
-              <a:rPr kumimoji="0" lang="hu-HU" altLang="hu-HU" sz="4000" b="0" i="0" u="none" strike="noStrike" cap="none" normalizeH="0" baseline="0" dirty="0">
-                <a:ln>
-                  <a:noFill/>
-                </a:ln>
+            <a:r>
+              <a:rPr lang="hu-HU" sz="900" dirty="0">
                 <a:solidFill>
                   <a:schemeClr val="bg1"/>
                 </a:solidFill>
-                <a:effectLst/>
-                <a:latin typeface="Montserrat ExtraBold" panose="00000900000000000000" pitchFamily="2" charset="-18"/>
-              </a:rPr>
-              <a:t>ÖSSZEHASONLÍTÓ OPERÁTOROK</a:t>
-            </a:r>
-          </a:p>
-        </p:txBody>
-      </p:sp>
-      <p:pic>
-        <p:nvPicPr>
-          <p:cNvPr id="6" name="Kép 5">
-            <a:extLst>
-              <a:ext uri="{FF2B5EF4-FFF2-40B4-BE49-F238E27FC236}">
-                <a16:creationId xmlns:a16="http://schemas.microsoft.com/office/drawing/2014/main" id="{438B4DC0-4F98-4DD8-B97E-5B13BB54BECF}"/>
-              </a:ext>
-            </a:extLst>
-          </p:cNvPr>
-          <p:cNvPicPr>
-            <a:picLocks noChangeAspect="1"/>
-          </p:cNvPicPr>
-          <p:nvPr/>
-        </p:nvPicPr>
-        <p:blipFill>
-          <a:blip r:embed="rId2">
-            <a:extLst>
-              <a:ext uri="{28A0092B-C50C-407E-A947-70E740481C1C}">
-                <a14:useLocalDpi xmlns:a14="http://schemas.microsoft.com/office/drawing/2010/main" val="0"/>
-              </a:ext>
-            </a:extLst>
-          </a:blip>
-          <a:stretch>
-            <a:fillRect/>
-          </a:stretch>
-        </p:blipFill>
-        <p:spPr>
-          <a:xfrm>
-            <a:off x="5416520" y="1684866"/>
-            <a:ext cx="7131080" cy="3894667"/>
-          </a:xfrm>
-          <a:prstGeom prst="rect">
-            <a:avLst/>
-          </a:prstGeom>
-        </p:spPr>
-      </p:pic>
+                <a:latin typeface="Montserrat ExtraBold" panose="00000900000000000000" pitchFamily="2" charset="-18"/>
+              </a:rPr>
+              <a:t>BACK</a:t>
+            </a:r>
+          </a:p>
+        </p:txBody>
+      </p:sp>
     </p:spTree>
     <p:extLst>
       <p:ext uri="{BB962C8B-B14F-4D97-AF65-F5344CB8AC3E}">
-        <p14:creationId xmlns:p14="http://schemas.microsoft.com/office/powerpoint/2010/main" val="1179921800"/>
+        <p14:creationId xmlns:p14="http://schemas.microsoft.com/office/powerpoint/2010/main" val="3048420670"/>
       </p:ext>
     </p:extLst>
   </p:cSld>
   <p:clrMapOvr>
     <a:masterClrMapping/>
   </p:clrMapOvr>
+  <mc:AlternateContent xmlns:mc="http://schemas.openxmlformats.org/markup-compatibility/2006">
+    <mc:Choice xmlns:p159="http://schemas.microsoft.com/office/powerpoint/2015/09/main" Requires="p159">
+      <p:transition xmlns:p14="http://schemas.microsoft.com/office/powerpoint/2010/main" spd="slow" p14:dur="2000">
+        <p159:morph option="byChar"/>
+      </p:transition>
+    </mc:Choice>
+    <mc:Fallback>
+      <p:transition spd="slow">
+        <p:fade/>
+      </p:transition>
+    </mc:Fallback>
+  </mc:AlternateContent>
 </p:sld>
 </file>
 
@@ -5144,7 +5564,7 @@
           <p:cNvPr id="2" name="Rectangle 1">
             <a:extLst>
               <a:ext uri="{FF2B5EF4-FFF2-40B4-BE49-F238E27FC236}">
-                <a16:creationId xmlns:a16="http://schemas.microsoft.com/office/drawing/2014/main" id="{083BDCA2-2F82-4F7D-8404-BC229C96F8A8}"/>
+                <a16:creationId xmlns:a16="http://schemas.microsoft.com/office/drawing/2014/main" id="{904A3B1A-4449-4429-8268-69CA3F6A0F7B}"/>
               </a:ext>
             </a:extLst>
           </p:cNvPr>
@@ -5155,8 +5575,8 @@
         </p:nvSpPr>
         <p:spPr bwMode="auto">
           <a:xfrm>
-            <a:off x="0" y="1358530"/>
-            <a:ext cx="10791645" cy="3416320"/>
+            <a:off x="283074" y="2206700"/>
+            <a:ext cx="6287059" cy="3416320"/>
           </a:xfrm>
           <a:prstGeom prst="rect">
             <a:avLst/>
@@ -5221,17 +5641,17 @@
               <a:tabLst/>
             </a:pPr>
             <a:r>
-              <a:rPr kumimoji="0" lang="hu-HU" altLang="hu-HU" sz="1800" b="0" i="0" u="none" strike="noStrike" cap="none" normalizeH="0" baseline="0">
+              <a:rPr kumimoji="0" lang="hu-HU" altLang="hu-HU" sz="2400" b="0" i="0" u="none" strike="noStrike" cap="none" normalizeH="0" baseline="0" dirty="0">
                 <a:ln>
                   <a:noFill/>
                 </a:ln>
                 <a:solidFill>
-                  <a:schemeClr val="tx1"/>
+                  <a:srgbClr val="002060"/>
                 </a:solidFill>
                 <a:effectLst/>
-                <a:latin typeface="Arial" panose="020B0604020202020204" pitchFamily="34" charset="0"/>
-              </a:rPr>
-              <a:t>LOGIKAI OPERÁTOROK</a:t>
+                <a:latin typeface="Montserrat ExtraBold" panose="00000900000000000000" pitchFamily="2" charset="-18"/>
+              </a:rPr>
+              <a:t>Az összehasonlító operátorok</a:t>
             </a:r>
           </a:p>
           <a:p>
@@ -5252,17 +5672,17 @@
               <a:tabLst/>
             </a:pPr>
             <a:r>
-              <a:rPr kumimoji="0" lang="hu-HU" altLang="hu-HU" sz="1800" b="0" i="0" u="none" strike="noStrike" cap="none" normalizeH="0" baseline="0">
+              <a:rPr kumimoji="0" lang="hu-HU" altLang="hu-HU" sz="2400" b="0" i="0" u="none" strike="noStrike" cap="none" normalizeH="0" baseline="0" dirty="0">
                 <a:ln>
                   <a:noFill/>
                 </a:ln>
                 <a:solidFill>
-                  <a:schemeClr val="tx1"/>
+                  <a:srgbClr val="002060"/>
                 </a:solidFill>
                 <a:effectLst/>
-                <a:latin typeface="Arial" panose="020B0604020202020204" pitchFamily="34" charset="0"/>
-              </a:rPr>
-              <a:t>A logikai operátorokat feltételek összekapcsolására vagy megfordítására használjuk.</a:t>
+                <a:latin typeface="Montserrat ExtraBold" panose="00000900000000000000" pitchFamily="2" charset="-18"/>
+              </a:rPr>
+              <a:t>két értéket hasonlítanak össze.</a:t>
             </a:r>
           </a:p>
           <a:p>
@@ -5283,67 +5703,43 @@
               <a:tabLst/>
             </a:pPr>
             <a:r>
-              <a:rPr kumimoji="0" lang="hu-HU" altLang="hu-HU" sz="1800" b="0" i="0" u="none" strike="noStrike" cap="none" normalizeH="0" baseline="0">
+              <a:rPr kumimoji="0" lang="hu-HU" altLang="hu-HU" sz="2400" b="0" i="0" u="none" strike="noStrike" cap="none" normalizeH="0" baseline="0" dirty="0">
                 <a:ln>
                   <a:noFill/>
                 </a:ln>
                 <a:solidFill>
-                  <a:schemeClr val="tx1"/>
+                  <a:srgbClr val="002060"/>
                 </a:solidFill>
                 <a:effectLst/>
-                <a:latin typeface="Arial" panose="020B0604020202020204" pitchFamily="34" charset="0"/>
-              </a:rPr>
-              <a:t>&amp;&amp; ÉS – mindkét feltételnek igaznak kell lennie</a:t>
-            </a:r>
-            <a:br>
-              <a:rPr kumimoji="0" lang="hu-HU" altLang="hu-HU" sz="1800" b="0" i="0" u="none" strike="noStrike" cap="none" normalizeH="0" baseline="0">
+                <a:latin typeface="Montserrat ExtraBold" panose="00000900000000000000" pitchFamily="2" charset="-18"/>
+              </a:rPr>
+              <a:t>Az eredmény mindig </a:t>
+            </a:r>
+            <a:r>
+              <a:rPr kumimoji="0" lang="hu-HU" altLang="hu-HU" sz="2400" b="0" i="0" u="none" strike="noStrike" cap="none" normalizeH="0" baseline="0" dirty="0" err="1">
                 <a:ln>
                   <a:noFill/>
                 </a:ln>
                 <a:solidFill>
-                  <a:schemeClr val="tx1"/>
+                  <a:srgbClr val="002060"/>
                 </a:solidFill>
                 <a:effectLst/>
-                <a:latin typeface="Arial" panose="020B0604020202020204" pitchFamily="34" charset="0"/>
-              </a:rPr>
-            </a:br>
-            <a:r>
-              <a:rPr kumimoji="0" lang="hu-HU" altLang="hu-HU" sz="1800" b="0" i="0" u="none" strike="noStrike" cap="none" normalizeH="0" baseline="0">
+                <a:latin typeface="Montserrat ExtraBold" panose="00000900000000000000" pitchFamily="2" charset="-18"/>
+              </a:rPr>
+              <a:t>true</a:t>
+            </a:r>
+            <a:r>
+              <a:rPr kumimoji="0" lang="hu-HU" altLang="hu-HU" sz="2400" b="0" i="0" u="none" strike="noStrike" cap="none" normalizeH="0" baseline="0" dirty="0">
                 <a:ln>
                   <a:noFill/>
                 </a:ln>
                 <a:solidFill>
-                  <a:schemeClr val="tx1"/>
+                  <a:srgbClr val="002060"/>
                 </a:solidFill>
                 <a:effectLst/>
-                <a:latin typeface="Arial" panose="020B0604020202020204" pitchFamily="34" charset="0"/>
-              </a:rPr>
-              <a:t>|| VAGY – legalább az egyik feltételnek igaznak kell lennie</a:t>
-            </a:r>
-            <a:br>
-              <a:rPr kumimoji="0" lang="hu-HU" altLang="hu-HU" sz="1800" b="0" i="0" u="none" strike="noStrike" cap="none" normalizeH="0" baseline="0">
-                <a:ln>
-                  <a:noFill/>
-                </a:ln>
-                <a:solidFill>
-                  <a:schemeClr val="tx1"/>
-                </a:solidFill>
-                <a:effectLst/>
-                <a:latin typeface="Arial" panose="020B0604020202020204" pitchFamily="34" charset="0"/>
-              </a:rPr>
-            </a:br>
-            <a:r>
-              <a:rPr kumimoji="0" lang="hu-HU" altLang="hu-HU" sz="1800" b="0" i="0" u="none" strike="noStrike" cap="none" normalizeH="0" baseline="0">
-                <a:ln>
-                  <a:noFill/>
-                </a:ln>
-                <a:solidFill>
-                  <a:schemeClr val="tx1"/>
-                </a:solidFill>
-                <a:effectLst/>
-                <a:latin typeface="Arial" panose="020B0604020202020204" pitchFamily="34" charset="0"/>
-              </a:rPr>
-              <a:t>! NEM – megfordítja a feltétel értékét</a:t>
+                <a:latin typeface="Montserrat ExtraBold" panose="00000900000000000000" pitchFamily="2" charset="-18"/>
+              </a:rPr>
+              <a:t> vagy false.</a:t>
             </a:r>
           </a:p>
           <a:p>
@@ -5364,17 +5760,42 @@
               <a:tabLst/>
             </a:pPr>
             <a:r>
-              <a:rPr kumimoji="0" lang="hu-HU" altLang="hu-HU" sz="1800" b="0" i="0" u="none" strike="noStrike" cap="none" normalizeH="0" baseline="0">
+              <a:rPr kumimoji="0" lang="hu-HU" altLang="hu-HU" sz="2400" b="0" i="0" u="none" strike="noStrike" cap="none" normalizeH="0" baseline="0" dirty="0">
                 <a:ln>
                   <a:noFill/>
                 </a:ln>
                 <a:solidFill>
-                  <a:schemeClr val="tx1"/>
+                  <a:srgbClr val="002060"/>
                 </a:solidFill>
                 <a:effectLst/>
-                <a:latin typeface="Arial" panose="020B0604020202020204" pitchFamily="34" charset="0"/>
-              </a:rPr>
-              <a:t>Példa:</a:t>
+                <a:latin typeface="Montserrat ExtraBold" panose="00000900000000000000" pitchFamily="2" charset="-18"/>
+              </a:rPr>
+              <a:t>== Egyenlő</a:t>
+            </a:r>
+            <a:br>
+              <a:rPr kumimoji="0" lang="hu-HU" altLang="hu-HU" sz="2400" b="0" i="0" u="none" strike="noStrike" cap="none" normalizeH="0" baseline="0" dirty="0">
+                <a:ln>
+                  <a:noFill/>
+                </a:ln>
+                <a:solidFill>
+                  <a:srgbClr val="002060"/>
+                </a:solidFill>
+                <a:effectLst/>
+                <a:latin typeface="Montserrat ExtraBold" panose="00000900000000000000" pitchFamily="2" charset="-18"/>
+              </a:rPr>
+            </a:br>
+            <a:r>
+              <a:rPr kumimoji="0" lang="hu-HU" altLang="hu-HU" sz="2400" b="0" i="0" u="none" strike="noStrike" cap="none" normalizeH="0" baseline="0" dirty="0">
+                <a:ln>
+                  <a:noFill/>
+                </a:ln>
+                <a:solidFill>
+                  <a:srgbClr val="002060"/>
+                </a:solidFill>
+                <a:effectLst/>
+                <a:latin typeface="Montserrat ExtraBold" panose="00000900000000000000" pitchFamily="2" charset="-18"/>
+              </a:rPr>
+              <a:t>!= Nem egyenlő</a:t>
             </a:r>
           </a:p>
           <a:p>
@@ -5395,46 +5816,125 @@
               <a:tabLst/>
             </a:pPr>
             <a:r>
-              <a:rPr kumimoji="0" lang="hu-HU" altLang="hu-HU" sz="1800" b="0" i="0" u="none" strike="noStrike" cap="none" normalizeH="0" baseline="0">
+              <a:rPr kumimoji="0" lang="hu-HU" altLang="hu-HU" sz="2400" b="0" i="0" u="none" strike="noStrike" cap="none" normalizeH="0" baseline="0" dirty="0">
                 <a:ln>
                   <a:noFill/>
                 </a:ln>
                 <a:solidFill>
-                  <a:schemeClr val="tx1"/>
+                  <a:srgbClr val="002060"/>
                 </a:solidFill>
                 <a:effectLst/>
-                <a:latin typeface="Arial" panose="020B0604020202020204" pitchFamily="34" charset="0"/>
-              </a:rPr>
-              <a:t>int age = 18;</a:t>
+                <a:latin typeface="Montserrat ExtraBold" panose="00000900000000000000" pitchFamily="2" charset="-18"/>
+              </a:rPr>
+              <a:t>Nagyobb</a:t>
             </a:r>
             <a:br>
-              <a:rPr kumimoji="0" lang="hu-HU" altLang="hu-HU" sz="1800" b="0" i="0" u="none" strike="noStrike" cap="none" normalizeH="0" baseline="0">
+              <a:rPr kumimoji="0" lang="hu-HU" altLang="hu-HU" sz="2400" b="0" i="0" u="none" strike="noStrike" cap="none" normalizeH="0" baseline="0" dirty="0">
                 <a:ln>
                   <a:noFill/>
                 </a:ln>
                 <a:solidFill>
-                  <a:schemeClr val="tx1"/>
+                  <a:srgbClr val="002060"/>
                 </a:solidFill>
                 <a:effectLst/>
-                <a:latin typeface="Arial" panose="020B0604020202020204" pitchFamily="34" charset="0"/>
+                <a:latin typeface="Montserrat ExtraBold" panose="00000900000000000000" pitchFamily="2" charset="-18"/>
               </a:rPr>
             </a:br>
             <a:r>
-              <a:rPr kumimoji="0" lang="hu-HU" altLang="hu-HU" sz="1800" b="0" i="0" u="none" strike="noStrike" cap="none" normalizeH="0" baseline="0">
+              <a:rPr kumimoji="0" lang="hu-HU" altLang="hu-HU" sz="2400" b="0" i="0" u="none" strike="noStrike" cap="none" normalizeH="0" baseline="0" dirty="0">
                 <a:ln>
                   <a:noFill/>
                 </a:ln>
                 <a:solidFill>
-                  <a:schemeClr val="tx1"/>
+                  <a:srgbClr val="002060"/>
                 </a:solidFill>
                 <a:effectLst/>
-                <a:latin typeface="Arial" panose="020B0604020202020204" pitchFamily="34" charset="0"/>
-              </a:rPr>
-              <a:t>bool hasTicket = true;</a:t>
-            </a:r>
-          </a:p>
-          <a:p>
-            <a:pPr marL="0" marR="0" lvl="0" indent="0" algn="l" defTabSz="914400" rtl="0" eaLnBrk="0" fontAlgn="base" latinLnBrk="0" hangingPunct="0">
+                <a:latin typeface="Montserrat ExtraBold" panose="00000900000000000000" pitchFamily="2" charset="-18"/>
+              </a:rPr>
+              <a:t>&lt; Kisebb</a:t>
+            </a:r>
+            <a:br>
+              <a:rPr kumimoji="0" lang="hu-HU" altLang="hu-HU" sz="2400" b="0" i="0" u="none" strike="noStrike" cap="none" normalizeH="0" baseline="0" dirty="0">
+                <a:ln>
+                  <a:noFill/>
+                </a:ln>
+                <a:solidFill>
+                  <a:srgbClr val="002060"/>
+                </a:solidFill>
+                <a:effectLst/>
+                <a:latin typeface="Montserrat ExtraBold" panose="00000900000000000000" pitchFamily="2" charset="-18"/>
+              </a:rPr>
+            </a:br>
+            <a:r>
+              <a:rPr kumimoji="0" lang="hu-HU" altLang="hu-HU" sz="2400" b="0" i="0" u="none" strike="noStrike" cap="none" normalizeH="0" baseline="0" dirty="0">
+                <a:ln>
+                  <a:noFill/>
+                </a:ln>
+                <a:solidFill>
+                  <a:srgbClr val="002060"/>
+                </a:solidFill>
+                <a:effectLst/>
+                <a:latin typeface="Montserrat ExtraBold" panose="00000900000000000000" pitchFamily="2" charset="-18"/>
+              </a:rPr>
+              <a:t>= Nagyobb vagy egyenlő</a:t>
+            </a:r>
+            <a:br>
+              <a:rPr kumimoji="0" lang="hu-HU" altLang="hu-HU" sz="2400" b="0" i="0" u="none" strike="noStrike" cap="none" normalizeH="0" baseline="0" dirty="0">
+                <a:ln>
+                  <a:noFill/>
+                </a:ln>
+                <a:solidFill>
+                  <a:srgbClr val="002060"/>
+                </a:solidFill>
+                <a:effectLst/>
+                <a:latin typeface="Montserrat ExtraBold" panose="00000900000000000000" pitchFamily="2" charset="-18"/>
+              </a:rPr>
+            </a:br>
+            <a:r>
+              <a:rPr kumimoji="0" lang="hu-HU" altLang="hu-HU" sz="2400" b="0" i="0" u="none" strike="noStrike" cap="none" normalizeH="0" baseline="0" dirty="0">
+                <a:ln>
+                  <a:noFill/>
+                </a:ln>
+                <a:solidFill>
+                  <a:srgbClr val="002060"/>
+                </a:solidFill>
+                <a:effectLst/>
+                <a:latin typeface="Montserrat ExtraBold" panose="00000900000000000000" pitchFamily="2" charset="-18"/>
+              </a:rPr>
+              <a:t>&lt;= Kisebb vagy egyenlő</a:t>
+            </a:r>
+          </a:p>
+        </p:txBody>
+      </p:sp>
+      <p:sp>
+        <p:nvSpPr>
+          <p:cNvPr id="4" name="Szövegdoboz 3">
+            <a:extLst>
+              <a:ext uri="{FF2B5EF4-FFF2-40B4-BE49-F238E27FC236}">
+                <a16:creationId xmlns:a16="http://schemas.microsoft.com/office/drawing/2014/main" id="{5DEE8835-BB6A-425F-9CE4-AA5C0007C7FF}"/>
+              </a:ext>
+            </a:extLst>
+          </p:cNvPr>
+          <p:cNvSpPr txBox="1"/>
+          <p:nvPr/>
+        </p:nvSpPr>
+        <p:spPr>
+          <a:xfrm>
+            <a:off x="3433233" y="196334"/>
+            <a:ext cx="5325534" cy="1323439"/>
+          </a:xfrm>
+          <a:prstGeom prst="rect">
+            <a:avLst/>
+          </a:prstGeom>
+          <a:noFill/>
+        </p:spPr>
+        <p:txBody>
+          <a:bodyPr wrap="square">
+            <a:spAutoFit/>
+          </a:bodyPr>
+          <a:lstStyle/>
+          <a:p>
+            <a:pPr marL="0" marR="0" lvl="0" indent="0" algn="ctr" defTabSz="914400" rtl="0" eaLnBrk="0" fontAlgn="base" latinLnBrk="0" hangingPunct="0">
               <a:lnSpc>
                 <a:spcPct val="100000"/>
               </a:lnSpc>
@@ -5451,92 +5951,141 @@
               <a:tabLst/>
             </a:pPr>
             <a:r>
-              <a:rPr kumimoji="0" lang="hu-HU" altLang="hu-HU" sz="1800" b="0" i="0" u="none" strike="noStrike" cap="none" normalizeH="0" baseline="0">
+              <a:rPr kumimoji="0" lang="hu-HU" altLang="hu-HU" sz="4000" b="0" i="0" u="none" strike="noStrike" cap="none" normalizeH="0" baseline="0" dirty="0">
                 <a:ln>
                   <a:noFill/>
                 </a:ln>
                 <a:solidFill>
-                  <a:schemeClr val="tx1"/>
+                  <a:schemeClr val="bg1"/>
                 </a:solidFill>
                 <a:effectLst/>
-                <a:latin typeface="Arial" panose="020B0604020202020204" pitchFamily="34" charset="0"/>
-              </a:rPr>
-              <a:t>if (age &gt;= 18 &amp;&amp; hasTicket)</a:t>
-            </a:r>
-            <a:br>
-              <a:rPr kumimoji="0" lang="hu-HU" altLang="hu-HU" sz="1800" b="0" i="0" u="none" strike="noStrike" cap="none" normalizeH="0" baseline="0">
-                <a:ln>
-                  <a:noFill/>
-                </a:ln>
-                <a:solidFill>
-                  <a:schemeClr val="tx1"/>
-                </a:solidFill>
-                <a:effectLst/>
-                <a:latin typeface="Arial" panose="020B0604020202020204" pitchFamily="34" charset="0"/>
-              </a:rPr>
-            </a:br>
-            <a:r>
-              <a:rPr kumimoji="0" lang="hu-HU" altLang="hu-HU" sz="1800" b="0" i="0" u="none" strike="noStrike" cap="none" normalizeH="0" baseline="0">
-                <a:ln>
-                  <a:noFill/>
-                </a:ln>
-                <a:solidFill>
-                  <a:schemeClr val="tx1"/>
-                </a:solidFill>
-                <a:effectLst/>
-                <a:latin typeface="Arial" panose="020B0604020202020204" pitchFamily="34" charset="0"/>
-              </a:rPr>
-              <a:t>{</a:t>
-            </a:r>
-            <a:br>
-              <a:rPr kumimoji="0" lang="hu-HU" altLang="hu-HU" sz="1800" b="0" i="0" u="none" strike="noStrike" cap="none" normalizeH="0" baseline="0">
-                <a:ln>
-                  <a:noFill/>
-                </a:ln>
-                <a:solidFill>
-                  <a:schemeClr val="tx1"/>
-                </a:solidFill>
-                <a:effectLst/>
-                <a:latin typeface="Arial" panose="020B0604020202020204" pitchFamily="34" charset="0"/>
-              </a:rPr>
-            </a:br>
-            <a:r>
-              <a:rPr kumimoji="0" lang="hu-HU" altLang="hu-HU" sz="1800" b="0" i="0" u="none" strike="noStrike" cap="none" normalizeH="0" baseline="0">
-                <a:ln>
-                  <a:noFill/>
-                </a:ln>
-                <a:solidFill>
-                  <a:schemeClr val="tx1"/>
-                </a:solidFill>
-                <a:effectLst/>
-                <a:latin typeface="Arial" panose="020B0604020202020204" pitchFamily="34" charset="0"/>
-              </a:rPr>
-              <a:t>Console.WriteLine("Beléphet.");</a:t>
-            </a:r>
-            <a:br>
-              <a:rPr kumimoji="0" lang="hu-HU" altLang="hu-HU" sz="1800" b="0" i="0" u="none" strike="noStrike" cap="none" normalizeH="0" baseline="0">
-                <a:ln>
-                  <a:noFill/>
-                </a:ln>
-                <a:solidFill>
-                  <a:schemeClr val="tx1"/>
-                </a:solidFill>
-                <a:effectLst/>
-                <a:latin typeface="Arial" panose="020B0604020202020204" pitchFamily="34" charset="0"/>
-              </a:rPr>
-            </a:br>
-            <a:r>
-              <a:rPr kumimoji="0" lang="hu-HU" altLang="hu-HU" sz="1800" b="0" i="0" u="none" strike="noStrike" cap="none" normalizeH="0" baseline="0">
-                <a:ln>
-                  <a:noFill/>
-                </a:ln>
-                <a:solidFill>
-                  <a:schemeClr val="tx1"/>
-                </a:solidFill>
-                <a:effectLst/>
-                <a:latin typeface="Arial" panose="020B0604020202020204" pitchFamily="34" charset="0"/>
-              </a:rPr>
-              <a:t>}</a:t>
+                <a:latin typeface="Montserrat ExtraBold" panose="00000900000000000000" pitchFamily="2" charset="-18"/>
+              </a:rPr>
+              <a:t>ÖSSZEHASONLÍTÓ OPERÁTOROK</a:t>
+            </a:r>
+          </a:p>
+        </p:txBody>
+      </p:sp>
+      <p:pic>
+        <p:nvPicPr>
+          <p:cNvPr id="6" name="Kép 5">
+            <a:extLst>
+              <a:ext uri="{FF2B5EF4-FFF2-40B4-BE49-F238E27FC236}">
+                <a16:creationId xmlns:a16="http://schemas.microsoft.com/office/drawing/2014/main" id="{438B4DC0-4F98-4DD8-B97E-5B13BB54BECF}"/>
+              </a:ext>
+            </a:extLst>
+          </p:cNvPr>
+          <p:cNvPicPr>
+            <a:picLocks noChangeAspect="1"/>
+          </p:cNvPicPr>
+          <p:nvPr/>
+        </p:nvPicPr>
+        <p:blipFill>
+          <a:blip r:embed="rId2">
+            <a:extLst>
+              <a:ext uri="{28A0092B-C50C-407E-A947-70E740481C1C}">
+                <a14:useLocalDpi xmlns:a14="http://schemas.microsoft.com/office/drawing/2010/main" val="0"/>
+              </a:ext>
+            </a:extLst>
+          </a:blip>
+          <a:stretch>
+            <a:fillRect/>
+          </a:stretch>
+        </p:blipFill>
+        <p:spPr>
+          <a:xfrm>
+            <a:off x="5772120" y="1728353"/>
+            <a:ext cx="7131080" cy="3894667"/>
+          </a:xfrm>
+          <a:prstGeom prst="rect">
+            <a:avLst/>
+          </a:prstGeom>
+        </p:spPr>
+      </p:pic>
+      <p:pic>
+        <p:nvPicPr>
+          <p:cNvPr id="5" name="Picture 10">
+            <a:hlinkClick r:id="rId3" action="ppaction://hlinksldjump"/>
+            <a:extLst>
+              <a:ext uri="{FF2B5EF4-FFF2-40B4-BE49-F238E27FC236}">
+                <a16:creationId xmlns:a16="http://schemas.microsoft.com/office/drawing/2014/main" id="{381CB5B1-69F9-4767-8866-AE39DFC7F61A}"/>
+              </a:ext>
+            </a:extLst>
+          </p:cNvPr>
+          <p:cNvPicPr>
+            <a:picLocks noChangeAspect="1" noChangeArrowheads="1"/>
+          </p:cNvPicPr>
+          <p:nvPr/>
+        </p:nvPicPr>
+        <p:blipFill>
+          <a:blip r:embed="rId4">
+            <a:extLst>
+              <a:ext uri="{28A0092B-C50C-407E-A947-70E740481C1C}">
+                <a14:useLocalDpi xmlns:a14="http://schemas.microsoft.com/office/drawing/2010/main" val="0"/>
+              </a:ext>
+            </a:extLst>
+          </a:blip>
+          <a:srcRect/>
+          <a:stretch>
+            <a:fillRect/>
+          </a:stretch>
+        </p:blipFill>
+        <p:spPr bwMode="auto">
+          <a:xfrm>
+            <a:off x="10785755" y="5700821"/>
+            <a:ext cx="1324810" cy="1324810"/>
+          </a:xfrm>
+          <a:prstGeom prst="rect">
+            <a:avLst/>
+          </a:prstGeom>
+          <a:noFill/>
+          <a:extLst>
+            <a:ext uri="{909E8E84-426E-40DD-AFC4-6F175D3DCCD1}">
+              <a14:hiddenFill xmlns:a14="http://schemas.microsoft.com/office/drawing/2010/main">
+                <a:solidFill>
+                  <a:srgbClr val="FFFFFF"/>
+                </a:solidFill>
+              </a14:hiddenFill>
+            </a:ext>
+          </a:extLst>
+        </p:spPr>
+      </p:pic>
+      <p:sp>
+        <p:nvSpPr>
+          <p:cNvPr id="7" name="Szövegdoboz 6">
+            <a:extLst>
+              <a:ext uri="{FF2B5EF4-FFF2-40B4-BE49-F238E27FC236}">
+                <a16:creationId xmlns:a16="http://schemas.microsoft.com/office/drawing/2014/main" id="{FE540999-071F-4D70-BB73-87FB96234496}"/>
+              </a:ext>
+            </a:extLst>
+          </p:cNvPr>
+          <p:cNvSpPr txBox="1"/>
+          <p:nvPr/>
+        </p:nvSpPr>
+        <p:spPr>
+          <a:xfrm>
+            <a:off x="11172079" y="5700821"/>
+            <a:ext cx="552162" cy="230832"/>
+          </a:xfrm>
+          <a:prstGeom prst="rect">
+            <a:avLst/>
+          </a:prstGeom>
+          <a:noFill/>
+        </p:spPr>
+        <p:txBody>
+          <a:bodyPr wrap="square" rtlCol="0">
+            <a:spAutoFit/>
+          </a:bodyPr>
+          <a:lstStyle/>
+          <a:p>
+            <a:r>
+              <a:rPr lang="hu-HU" sz="900" dirty="0">
+                <a:solidFill>
+                  <a:schemeClr val="bg1"/>
+                </a:solidFill>
+                <a:latin typeface="Montserrat ExtraBold" panose="00000900000000000000" pitchFamily="2" charset="-18"/>
+              </a:rPr>
+              <a:t>BACK</a:t>
             </a:r>
           </a:p>
         </p:txBody>
@@ -5544,13 +6093,25 @@
     </p:spTree>
     <p:extLst>
       <p:ext uri="{BB962C8B-B14F-4D97-AF65-F5344CB8AC3E}">
-        <p14:creationId xmlns:p14="http://schemas.microsoft.com/office/powerpoint/2010/main" val="1385493957"/>
+        <p14:creationId xmlns:p14="http://schemas.microsoft.com/office/powerpoint/2010/main" val="1179921800"/>
       </p:ext>
     </p:extLst>
   </p:cSld>
   <p:clrMapOvr>
     <a:masterClrMapping/>
   </p:clrMapOvr>
+  <mc:AlternateContent xmlns:mc="http://schemas.openxmlformats.org/markup-compatibility/2006">
+    <mc:Choice xmlns:p159="http://schemas.microsoft.com/office/powerpoint/2015/09/main" Requires="p159">
+      <p:transition xmlns:p14="http://schemas.microsoft.com/office/powerpoint/2010/main" spd="slow" p14:dur="2000">
+        <p159:morph option="byChar"/>
+      </p:transition>
+    </mc:Choice>
+    <mc:Fallback>
+      <p:transition spd="slow">
+        <p:fade/>
+      </p:transition>
+    </mc:Fallback>
+  </mc:AlternateContent>
 </p:sld>
 </file>
 
@@ -5576,7 +6137,7 @@
           <p:cNvPr id="2" name="Rectangle 1">
             <a:extLst>
               <a:ext uri="{FF2B5EF4-FFF2-40B4-BE49-F238E27FC236}">
-                <a16:creationId xmlns:a16="http://schemas.microsoft.com/office/drawing/2014/main" id="{EFC505C7-2B43-4BEC-AB26-C94F7BAFDB90}"/>
+                <a16:creationId xmlns:a16="http://schemas.microsoft.com/office/drawing/2014/main" id="{083BDCA2-2F82-4F7D-8404-BC229C96F8A8}"/>
               </a:ext>
             </a:extLst>
           </p:cNvPr>
@@ -5587,8 +6148,8 @@
         </p:nvSpPr>
         <p:spPr bwMode="auto">
           <a:xfrm>
-            <a:off x="558800" y="1045908"/>
-            <a:ext cx="10727267" cy="3970318"/>
+            <a:off x="372535" y="2349130"/>
+            <a:ext cx="5588000" cy="3416320"/>
           </a:xfrm>
           <a:prstGeom prst="rect">
             <a:avLst/>
@@ -5653,17 +6214,17 @@
               <a:tabLst/>
             </a:pPr>
             <a:r>
-              <a:rPr kumimoji="0" lang="hu-HU" altLang="hu-HU" sz="1800" b="0" i="0" u="none" strike="noStrike" cap="none" normalizeH="0" baseline="0">
+              <a:rPr kumimoji="0" lang="hu-HU" altLang="hu-HU" sz="2400" b="0" i="0" u="none" strike="noStrike" cap="none" normalizeH="0" baseline="0" dirty="0">
                 <a:ln>
                   <a:noFill/>
                 </a:ln>
                 <a:solidFill>
-                  <a:schemeClr val="tx1"/>
+                  <a:srgbClr val="002060"/>
                 </a:solidFill>
                 <a:effectLst/>
-                <a:latin typeface="Arial" panose="020B0604020202020204" pitchFamily="34" charset="0"/>
-              </a:rPr>
-              <a:t>ÉRTÉKADÓ OPERÁTOROK</a:t>
+                <a:latin typeface="Montserrat ExtraBold" panose="00000900000000000000" pitchFamily="2" charset="-18"/>
+              </a:rPr>
+              <a:t>A logikai operátorokat feltételek összekapcsolására vagy megfordítására használjuk.</a:t>
             </a:r>
           </a:p>
           <a:p>
@@ -5684,19 +6245,98 @@
               <a:tabLst/>
             </a:pPr>
             <a:r>
-              <a:rPr kumimoji="0" lang="hu-HU" altLang="hu-HU" sz="1800" b="0" i="0" u="none" strike="noStrike" cap="none" normalizeH="0" baseline="0">
+              <a:rPr kumimoji="0" lang="hu-HU" altLang="hu-HU" sz="2400" b="0" i="0" u="none" strike="noStrike" cap="none" normalizeH="0" baseline="0" dirty="0">
                 <a:ln>
                   <a:noFill/>
                 </a:ln>
                 <a:solidFill>
-                  <a:schemeClr val="tx1"/>
+                  <a:srgbClr val="002060"/>
                 </a:solidFill>
                 <a:effectLst/>
-                <a:latin typeface="Arial" panose="020B0604020202020204" pitchFamily="34" charset="0"/>
-              </a:rPr>
-              <a:t>Az értékadó operátorokkal értéket adhatunk egy változónak, illetve egy meglévő értéket módosíthatunk.</a:t>
-            </a:r>
-          </a:p>
+                <a:latin typeface="Montserrat ExtraBold" panose="00000900000000000000" pitchFamily="2" charset="-18"/>
+              </a:rPr>
+              <a:t>&amp;&amp; ÉS – mindkét feltételnek igaznak kell lennie</a:t>
+            </a:r>
+            <a:br>
+              <a:rPr kumimoji="0" lang="hu-HU" altLang="hu-HU" sz="2400" b="0" i="0" u="none" strike="noStrike" cap="none" normalizeH="0" baseline="0" dirty="0">
+                <a:ln>
+                  <a:noFill/>
+                </a:ln>
+                <a:solidFill>
+                  <a:srgbClr val="002060"/>
+                </a:solidFill>
+                <a:effectLst/>
+                <a:latin typeface="Montserrat ExtraBold" panose="00000900000000000000" pitchFamily="2" charset="-18"/>
+              </a:rPr>
+            </a:br>
+            <a:r>
+              <a:rPr kumimoji="0" lang="hu-HU" altLang="hu-HU" sz="2400" b="0" i="0" u="none" strike="noStrike" cap="none" normalizeH="0" baseline="0" dirty="0">
+                <a:ln>
+                  <a:noFill/>
+                </a:ln>
+                <a:solidFill>
+                  <a:srgbClr val="002060"/>
+                </a:solidFill>
+                <a:effectLst/>
+                <a:latin typeface="Montserrat ExtraBold" panose="00000900000000000000" pitchFamily="2" charset="-18"/>
+              </a:rPr>
+              <a:t>|| VAGY – legalább az egyik feltételnek igaznak kell lennie</a:t>
+            </a:r>
+            <a:br>
+              <a:rPr kumimoji="0" lang="hu-HU" altLang="hu-HU" sz="2400" b="0" i="0" u="none" strike="noStrike" cap="none" normalizeH="0" baseline="0" dirty="0">
+                <a:ln>
+                  <a:noFill/>
+                </a:ln>
+                <a:solidFill>
+                  <a:srgbClr val="002060"/>
+                </a:solidFill>
+                <a:effectLst/>
+                <a:latin typeface="Montserrat ExtraBold" panose="00000900000000000000" pitchFamily="2" charset="-18"/>
+              </a:rPr>
+            </a:br>
+            <a:r>
+              <a:rPr kumimoji="0" lang="hu-HU" altLang="hu-HU" sz="2400" b="0" i="0" u="none" strike="noStrike" cap="none" normalizeH="0" baseline="0" dirty="0">
+                <a:ln>
+                  <a:noFill/>
+                </a:ln>
+                <a:solidFill>
+                  <a:srgbClr val="002060"/>
+                </a:solidFill>
+                <a:effectLst/>
+                <a:latin typeface="Montserrat ExtraBold" panose="00000900000000000000" pitchFamily="2" charset="-18"/>
+              </a:rPr>
+              <a:t>! NEM – megfordítja a feltétel értékét</a:t>
+            </a:r>
+          </a:p>
+        </p:txBody>
+      </p:sp>
+      <p:sp>
+        <p:nvSpPr>
+          <p:cNvPr id="4" name="Szövegdoboz 3">
+            <a:extLst>
+              <a:ext uri="{FF2B5EF4-FFF2-40B4-BE49-F238E27FC236}">
+                <a16:creationId xmlns:a16="http://schemas.microsoft.com/office/drawing/2014/main" id="{24A57320-023A-4138-9CB8-0911C32CE57E}"/>
+              </a:ext>
+            </a:extLst>
+          </p:cNvPr>
+          <p:cNvSpPr txBox="1"/>
+          <p:nvPr/>
+        </p:nvSpPr>
+        <p:spPr>
+          <a:xfrm>
+            <a:off x="2749550" y="213268"/>
+            <a:ext cx="6692900" cy="707886"/>
+          </a:xfrm>
+          <a:prstGeom prst="rect">
+            <a:avLst/>
+          </a:prstGeom>
+          <a:noFill/>
+        </p:spPr>
+        <p:txBody>
+          <a:bodyPr wrap="square">
+            <a:spAutoFit/>
+          </a:bodyPr>
+          <a:lstStyle/>
           <a:p>
             <a:pPr marL="0" marR="0" lvl="0" indent="0" algn="l" defTabSz="914400" rtl="0" eaLnBrk="0" fontAlgn="base" latinLnBrk="0" hangingPunct="0">
               <a:lnSpc>
@@ -5715,316 +6355,135 @@
               <a:tabLst/>
             </a:pPr>
             <a:r>
-              <a:rPr kumimoji="0" lang="hu-HU" altLang="hu-HU" sz="1800" b="0" i="0" u="none" strike="noStrike" cap="none" normalizeH="0" baseline="0">
+              <a:rPr kumimoji="0" lang="hu-HU" altLang="hu-HU" sz="4000" b="0" i="0" u="none" strike="noStrike" cap="none" normalizeH="0" baseline="0" dirty="0">
                 <a:ln>
                   <a:noFill/>
                 </a:ln>
                 <a:solidFill>
-                  <a:schemeClr val="tx1"/>
+                  <a:schemeClr val="bg1"/>
                 </a:solidFill>
                 <a:effectLst/>
-                <a:latin typeface="Arial" panose="020B0604020202020204" pitchFamily="34" charset="0"/>
-              </a:rPr>
-              <a:t>= Értékadás</a:t>
-            </a:r>
-            <a:br>
-              <a:rPr kumimoji="0" lang="hu-HU" altLang="hu-HU" sz="1800" b="0" i="0" u="none" strike="noStrike" cap="none" normalizeH="0" baseline="0">
-                <a:ln>
-                  <a:noFill/>
-                </a:ln>
-                <a:solidFill>
-                  <a:schemeClr val="tx1"/>
-                </a:solidFill>
-                <a:effectLst/>
-                <a:latin typeface="Arial" panose="020B0604020202020204" pitchFamily="34" charset="0"/>
-              </a:rPr>
-            </a:br>
-            <a:r>
-              <a:rPr kumimoji="0" lang="hu-HU" altLang="hu-HU" sz="1800" b="0" i="0" u="none" strike="noStrike" cap="none" normalizeH="0" baseline="0">
-                <a:ln>
-                  <a:noFill/>
-                </a:ln>
-                <a:solidFill>
-                  <a:schemeClr val="tx1"/>
-                </a:solidFill>
-                <a:effectLst/>
-                <a:latin typeface="Arial" panose="020B0604020202020204" pitchFamily="34" charset="0"/>
-              </a:rPr>
-              <a:t>+= Hozzáadás és értékadás</a:t>
-            </a:r>
-            <a:br>
-              <a:rPr kumimoji="0" lang="hu-HU" altLang="hu-HU" sz="1800" b="0" i="0" u="none" strike="noStrike" cap="none" normalizeH="0" baseline="0">
-                <a:ln>
-                  <a:noFill/>
-                </a:ln>
-                <a:solidFill>
-                  <a:schemeClr val="tx1"/>
-                </a:solidFill>
-                <a:effectLst/>
-                <a:latin typeface="Arial" panose="020B0604020202020204" pitchFamily="34" charset="0"/>
-              </a:rPr>
-            </a:br>
-            <a:r>
-              <a:rPr kumimoji="0" lang="hu-HU" altLang="hu-HU" sz="1800" b="0" i="0" u="none" strike="noStrike" cap="none" normalizeH="0" baseline="0">
-                <a:ln>
-                  <a:noFill/>
-                </a:ln>
-                <a:solidFill>
-                  <a:schemeClr val="tx1"/>
-                </a:solidFill>
-                <a:effectLst/>
-                <a:latin typeface="Arial" panose="020B0604020202020204" pitchFamily="34" charset="0"/>
-              </a:rPr>
-              <a:t>-= Kivonás és értékadás</a:t>
-            </a:r>
-            <a:br>
-              <a:rPr kumimoji="0" lang="hu-HU" altLang="hu-HU" sz="1800" b="0" i="0" u="none" strike="noStrike" cap="none" normalizeH="0" baseline="0">
-                <a:ln>
-                  <a:noFill/>
-                </a:ln>
-                <a:solidFill>
-                  <a:schemeClr val="tx1"/>
-                </a:solidFill>
-                <a:effectLst/>
-                <a:latin typeface="Arial" panose="020B0604020202020204" pitchFamily="34" charset="0"/>
-              </a:rPr>
-            </a:br>
-            <a:r>
-              <a:rPr kumimoji="0" lang="hu-HU" altLang="hu-HU" sz="1800" b="0" i="0" u="none" strike="noStrike" cap="none" normalizeH="0" baseline="0">
-                <a:ln>
-                  <a:noFill/>
-                </a:ln>
-                <a:solidFill>
-                  <a:schemeClr val="tx1"/>
-                </a:solidFill>
-                <a:effectLst/>
-                <a:latin typeface="Arial" panose="020B0604020202020204" pitchFamily="34" charset="0"/>
-              </a:rPr>
-              <a:t>*= Szorzás és értékadás</a:t>
-            </a:r>
-            <a:br>
-              <a:rPr kumimoji="0" lang="hu-HU" altLang="hu-HU" sz="1800" b="0" i="0" u="none" strike="noStrike" cap="none" normalizeH="0" baseline="0">
-                <a:ln>
-                  <a:noFill/>
-                </a:ln>
-                <a:solidFill>
-                  <a:schemeClr val="tx1"/>
-                </a:solidFill>
-                <a:effectLst/>
-                <a:latin typeface="Arial" panose="020B0604020202020204" pitchFamily="34" charset="0"/>
-              </a:rPr>
-            </a:br>
-            <a:r>
-              <a:rPr kumimoji="0" lang="hu-HU" altLang="hu-HU" sz="1800" b="0" i="0" u="none" strike="noStrike" cap="none" normalizeH="0" baseline="0">
-                <a:ln>
-                  <a:noFill/>
-                </a:ln>
-                <a:solidFill>
-                  <a:schemeClr val="tx1"/>
-                </a:solidFill>
-                <a:effectLst/>
-                <a:latin typeface="Arial" panose="020B0604020202020204" pitchFamily="34" charset="0"/>
-              </a:rPr>
-              <a:t>/= Osztás és értékadás</a:t>
-            </a:r>
-            <a:br>
-              <a:rPr kumimoji="0" lang="hu-HU" altLang="hu-HU" sz="1800" b="0" i="0" u="none" strike="noStrike" cap="none" normalizeH="0" baseline="0">
-                <a:ln>
-                  <a:noFill/>
-                </a:ln>
-                <a:solidFill>
-                  <a:schemeClr val="tx1"/>
-                </a:solidFill>
-                <a:effectLst/>
-                <a:latin typeface="Arial" panose="020B0604020202020204" pitchFamily="34" charset="0"/>
-              </a:rPr>
-            </a:br>
-            <a:r>
-              <a:rPr kumimoji="0" lang="hu-HU" altLang="hu-HU" sz="1800" b="0" i="0" u="none" strike="noStrike" cap="none" normalizeH="0" baseline="0">
-                <a:ln>
-                  <a:noFill/>
-                </a:ln>
-                <a:solidFill>
-                  <a:schemeClr val="tx1"/>
-                </a:solidFill>
-                <a:effectLst/>
-                <a:latin typeface="Arial" panose="020B0604020202020204" pitchFamily="34" charset="0"/>
-              </a:rPr>
-              <a:t>%= Maradékos osztás és értékadás</a:t>
-            </a:r>
-          </a:p>
-          <a:p>
-            <a:pPr marL="0" marR="0" lvl="0" indent="0" algn="l" defTabSz="914400" rtl="0" eaLnBrk="0" fontAlgn="base" latinLnBrk="0" hangingPunct="0">
-              <a:lnSpc>
-                <a:spcPct val="100000"/>
-              </a:lnSpc>
-              <a:spcBef>
-                <a:spcPct val="0"/>
-              </a:spcBef>
-              <a:spcAft>
-                <a:spcPct val="0"/>
-              </a:spcAft>
-              <a:buClrTx/>
-              <a:buSzTx/>
-              <a:buFontTx/>
-              <a:buNone/>
-              <a:tabLst/>
-            </a:pPr>
-            <a:r>
-              <a:rPr kumimoji="0" lang="hu-HU" altLang="hu-HU" sz="1800" b="0" i="0" u="none" strike="noStrike" cap="none" normalizeH="0" baseline="0">
-                <a:ln>
-                  <a:noFill/>
-                </a:ln>
-                <a:solidFill>
-                  <a:schemeClr val="tx1"/>
-                </a:solidFill>
-                <a:effectLst/>
-                <a:latin typeface="Arial" panose="020B0604020202020204" pitchFamily="34" charset="0"/>
-              </a:rPr>
-              <a:t>Példa:</a:t>
-            </a:r>
-          </a:p>
-          <a:p>
-            <a:pPr marL="0" marR="0" lvl="0" indent="0" algn="l" defTabSz="914400" rtl="0" eaLnBrk="0" fontAlgn="base" latinLnBrk="0" hangingPunct="0">
-              <a:lnSpc>
-                <a:spcPct val="100000"/>
-              </a:lnSpc>
-              <a:spcBef>
-                <a:spcPct val="0"/>
-              </a:spcBef>
-              <a:spcAft>
-                <a:spcPct val="0"/>
-              </a:spcAft>
-              <a:buClrTx/>
-              <a:buSzTx/>
-              <a:buFontTx/>
-              <a:buNone/>
-              <a:tabLst/>
-            </a:pPr>
-            <a:r>
-              <a:rPr kumimoji="0" lang="hu-HU" altLang="hu-HU" sz="1800" b="0" i="0" u="none" strike="noStrike" cap="none" normalizeH="0" baseline="0">
-                <a:ln>
-                  <a:noFill/>
-                </a:ln>
-                <a:solidFill>
-                  <a:schemeClr val="tx1"/>
-                </a:solidFill>
-                <a:effectLst/>
-                <a:latin typeface="Arial" panose="020B0604020202020204" pitchFamily="34" charset="0"/>
-              </a:rPr>
-              <a:t>int x = 10;</a:t>
-            </a:r>
-          </a:p>
-          <a:p>
-            <a:pPr marL="0" marR="0" lvl="0" indent="0" algn="l" defTabSz="914400" rtl="0" eaLnBrk="0" fontAlgn="base" latinLnBrk="0" hangingPunct="0">
-              <a:lnSpc>
-                <a:spcPct val="100000"/>
-              </a:lnSpc>
-              <a:spcBef>
-                <a:spcPct val="0"/>
-              </a:spcBef>
-              <a:spcAft>
-                <a:spcPct val="0"/>
-              </a:spcAft>
-              <a:buClrTx/>
-              <a:buSzTx/>
-              <a:buFontTx/>
-              <a:buNone/>
-              <a:tabLst/>
-            </a:pPr>
-            <a:r>
-              <a:rPr kumimoji="0" lang="hu-HU" altLang="hu-HU" sz="1800" b="0" i="0" u="none" strike="noStrike" cap="none" normalizeH="0" baseline="0">
-                <a:ln>
-                  <a:noFill/>
-                </a:ln>
-                <a:solidFill>
-                  <a:schemeClr val="tx1"/>
-                </a:solidFill>
-                <a:effectLst/>
-                <a:latin typeface="Arial" panose="020B0604020202020204" pitchFamily="34" charset="0"/>
-              </a:rPr>
-              <a:t>x += 5;</a:t>
-            </a:r>
-            <a:br>
-              <a:rPr kumimoji="0" lang="hu-HU" altLang="hu-HU" sz="1800" b="0" i="0" u="none" strike="noStrike" cap="none" normalizeH="0" baseline="0">
-                <a:ln>
-                  <a:noFill/>
-                </a:ln>
-                <a:solidFill>
-                  <a:schemeClr val="tx1"/>
-                </a:solidFill>
-                <a:effectLst/>
-                <a:latin typeface="Arial" panose="020B0604020202020204" pitchFamily="34" charset="0"/>
-              </a:rPr>
-            </a:br>
-            <a:r>
-              <a:rPr kumimoji="0" lang="hu-HU" altLang="hu-HU" sz="1800" b="0" i="0" u="none" strike="noStrike" cap="none" normalizeH="0" baseline="0">
-                <a:ln>
-                  <a:noFill/>
-                </a:ln>
-                <a:solidFill>
-                  <a:schemeClr val="tx1"/>
-                </a:solidFill>
-                <a:effectLst/>
-                <a:latin typeface="Arial" panose="020B0604020202020204" pitchFamily="34" charset="0"/>
-              </a:rPr>
-              <a:t>Console.WriteLine(x); // 15</a:t>
-            </a:r>
-          </a:p>
-          <a:p>
-            <a:pPr marL="0" marR="0" lvl="0" indent="0" algn="l" defTabSz="914400" rtl="0" eaLnBrk="0" fontAlgn="base" latinLnBrk="0" hangingPunct="0">
-              <a:lnSpc>
-                <a:spcPct val="100000"/>
-              </a:lnSpc>
-              <a:spcBef>
-                <a:spcPct val="0"/>
-              </a:spcBef>
-              <a:spcAft>
-                <a:spcPct val="0"/>
-              </a:spcAft>
-              <a:buClrTx/>
-              <a:buSzTx/>
-              <a:buFontTx/>
-              <a:buNone/>
-              <a:tabLst/>
-            </a:pPr>
-            <a:r>
-              <a:rPr kumimoji="0" lang="hu-HU" altLang="hu-HU" sz="1800" b="0" i="0" u="none" strike="noStrike" cap="none" normalizeH="0" baseline="0">
-                <a:ln>
-                  <a:noFill/>
-                </a:ln>
-                <a:solidFill>
-                  <a:schemeClr val="tx1"/>
-                </a:solidFill>
-                <a:effectLst/>
-                <a:latin typeface="Arial" panose="020B0604020202020204" pitchFamily="34" charset="0"/>
-              </a:rPr>
-              <a:t>x *= 2;</a:t>
-            </a:r>
-            <a:br>
-              <a:rPr kumimoji="0" lang="hu-HU" altLang="hu-HU" sz="1800" b="0" i="0" u="none" strike="noStrike" cap="none" normalizeH="0" baseline="0">
-                <a:ln>
-                  <a:noFill/>
-                </a:ln>
-                <a:solidFill>
-                  <a:schemeClr val="tx1"/>
-                </a:solidFill>
-                <a:effectLst/>
-                <a:latin typeface="Arial" panose="020B0604020202020204" pitchFamily="34" charset="0"/>
-              </a:rPr>
-            </a:br>
-            <a:r>
-              <a:rPr kumimoji="0" lang="hu-HU" altLang="hu-HU" sz="1800" b="0" i="0" u="none" strike="noStrike" cap="none" normalizeH="0" baseline="0">
-                <a:ln>
-                  <a:noFill/>
-                </a:ln>
-                <a:solidFill>
-                  <a:schemeClr val="tx1"/>
-                </a:solidFill>
-                <a:effectLst/>
-                <a:latin typeface="Arial" panose="020B0604020202020204" pitchFamily="34" charset="0"/>
-              </a:rPr>
-              <a:t>Console.WriteLine(x); // 30</a:t>
+                <a:latin typeface="Montserrat ExtraBold" panose="00000900000000000000" pitchFamily="2" charset="-18"/>
+              </a:rPr>
+              <a:t>LOGIKAI OPERÁTOROK</a:t>
+            </a:r>
+          </a:p>
+        </p:txBody>
+      </p:sp>
+      <p:pic>
+        <p:nvPicPr>
+          <p:cNvPr id="8" name="Kép 7">
+            <a:extLst>
+              <a:ext uri="{FF2B5EF4-FFF2-40B4-BE49-F238E27FC236}">
+                <a16:creationId xmlns:a16="http://schemas.microsoft.com/office/drawing/2014/main" id="{88A20A0F-6934-44E6-AB11-34EF8F045A88}"/>
+              </a:ext>
+            </a:extLst>
+          </p:cNvPr>
+          <p:cNvPicPr>
+            <a:picLocks noChangeAspect="1"/>
+          </p:cNvPicPr>
+          <p:nvPr/>
+        </p:nvPicPr>
+        <p:blipFill>
+          <a:blip r:embed="rId2"/>
+          <a:stretch>
+            <a:fillRect/>
+          </a:stretch>
+        </p:blipFill>
+        <p:spPr>
+          <a:xfrm>
+            <a:off x="5960535" y="1583267"/>
+            <a:ext cx="6816630" cy="4614334"/>
+          </a:xfrm>
+          <a:prstGeom prst="rect">
+            <a:avLst/>
+          </a:prstGeom>
+        </p:spPr>
+      </p:pic>
+      <p:pic>
+        <p:nvPicPr>
+          <p:cNvPr id="9" name="Picture 10">
+            <a:hlinkClick r:id="rId3" action="ppaction://hlinksldjump"/>
+            <a:extLst>
+              <a:ext uri="{FF2B5EF4-FFF2-40B4-BE49-F238E27FC236}">
+                <a16:creationId xmlns:a16="http://schemas.microsoft.com/office/drawing/2014/main" id="{7CBD948C-C93A-469A-AB61-F100362F525C}"/>
+              </a:ext>
+            </a:extLst>
+          </p:cNvPr>
+          <p:cNvPicPr>
+            <a:picLocks noChangeAspect="1" noChangeArrowheads="1"/>
+          </p:cNvPicPr>
+          <p:nvPr/>
+        </p:nvPicPr>
+        <p:blipFill>
+          <a:blip r:embed="rId4">
+            <a:extLst>
+              <a:ext uri="{28A0092B-C50C-407E-A947-70E740481C1C}">
+                <a14:useLocalDpi xmlns:a14="http://schemas.microsoft.com/office/drawing/2010/main" val="0"/>
+              </a:ext>
+            </a:extLst>
+          </a:blip>
+          <a:srcRect/>
+          <a:stretch>
+            <a:fillRect/>
+          </a:stretch>
+        </p:blipFill>
+        <p:spPr bwMode="auto">
+          <a:xfrm>
+            <a:off x="10785755" y="5700821"/>
+            <a:ext cx="1324810" cy="1324810"/>
+          </a:xfrm>
+          <a:prstGeom prst="rect">
+            <a:avLst/>
+          </a:prstGeom>
+          <a:noFill/>
+          <a:extLst>
+            <a:ext uri="{909E8E84-426E-40DD-AFC4-6F175D3DCCD1}">
+              <a14:hiddenFill xmlns:a14="http://schemas.microsoft.com/office/drawing/2010/main">
+                <a:solidFill>
+                  <a:srgbClr val="FFFFFF"/>
+                </a:solidFill>
+              </a14:hiddenFill>
+            </a:ext>
+          </a:extLst>
+        </p:spPr>
+      </p:pic>
+      <p:sp>
+        <p:nvSpPr>
+          <p:cNvPr id="10" name="Szövegdoboz 9">
+            <a:extLst>
+              <a:ext uri="{FF2B5EF4-FFF2-40B4-BE49-F238E27FC236}">
+                <a16:creationId xmlns:a16="http://schemas.microsoft.com/office/drawing/2014/main" id="{C26CB84D-CC06-4218-99FB-E713DBA75FC4}"/>
+              </a:ext>
+            </a:extLst>
+          </p:cNvPr>
+          <p:cNvSpPr txBox="1"/>
+          <p:nvPr/>
+        </p:nvSpPr>
+        <p:spPr>
+          <a:xfrm>
+            <a:off x="11172079" y="5700821"/>
+            <a:ext cx="552162" cy="230832"/>
+          </a:xfrm>
+          <a:prstGeom prst="rect">
+            <a:avLst/>
+          </a:prstGeom>
+          <a:noFill/>
+        </p:spPr>
+        <p:txBody>
+          <a:bodyPr wrap="square" rtlCol="0">
+            <a:spAutoFit/>
+          </a:bodyPr>
+          <a:lstStyle/>
+          <a:p>
+            <a:r>
+              <a:rPr lang="hu-HU" sz="900" dirty="0">
+                <a:solidFill>
+                  <a:schemeClr val="bg1"/>
+                </a:solidFill>
+                <a:latin typeface="Montserrat ExtraBold" panose="00000900000000000000" pitchFamily="2" charset="-18"/>
+              </a:rPr>
+              <a:t>BACK</a:t>
             </a:r>
           </a:p>
         </p:txBody>
@@ -6032,13 +6491,25 @@
     </p:spTree>
     <p:extLst>
       <p:ext uri="{BB962C8B-B14F-4D97-AF65-F5344CB8AC3E}">
-        <p14:creationId xmlns:p14="http://schemas.microsoft.com/office/powerpoint/2010/main" val="3048420670"/>
+        <p14:creationId xmlns:p14="http://schemas.microsoft.com/office/powerpoint/2010/main" val="1385493957"/>
       </p:ext>
     </p:extLst>
   </p:cSld>
   <p:clrMapOvr>
     <a:masterClrMapping/>
   </p:clrMapOvr>
+  <mc:AlternateContent xmlns:mc="http://schemas.openxmlformats.org/markup-compatibility/2006">
+    <mc:Choice xmlns:p159="http://schemas.microsoft.com/office/powerpoint/2015/09/main" Requires="p159">
+      <p:transition xmlns:p14="http://schemas.microsoft.com/office/powerpoint/2010/main" spd="slow" p14:dur="2000">
+        <p159:morph option="byChar"/>
+      </p:transition>
+    </mc:Choice>
+    <mc:Fallback>
+      <p:transition spd="slow">
+        <p:fade/>
+      </p:transition>
+    </mc:Fallback>
+  </mc:AlternateContent>
 </p:sld>
 </file>
 
@@ -6075,8 +6546,8 @@
         </p:nvSpPr>
         <p:spPr bwMode="auto">
           <a:xfrm>
-            <a:off x="279400" y="1492240"/>
-            <a:ext cx="8619067" cy="3416320"/>
+            <a:off x="225266" y="2055800"/>
+            <a:ext cx="5645467" cy="3046988"/>
           </a:xfrm>
           <a:prstGeom prst="rect">
             <a:avLst/>
@@ -6141,17 +6612,17 @@
               <a:tabLst/>
             </a:pPr>
             <a:r>
-              <a:rPr kumimoji="0" lang="hu-HU" altLang="hu-HU" sz="1800" b="0" i="0" u="none" strike="noStrike" cap="none" normalizeH="0" baseline="0">
+              <a:rPr kumimoji="0" lang="hu-HU" altLang="hu-HU" sz="2400" b="0" i="0" u="none" strike="noStrike" cap="none" normalizeH="0" baseline="0" dirty="0">
                 <a:ln>
                   <a:noFill/>
                 </a:ln>
                 <a:solidFill>
-                  <a:schemeClr val="tx1"/>
+                  <a:srgbClr val="002060"/>
                 </a:solidFill>
                 <a:effectLst/>
-                <a:latin typeface="Arial" panose="020B0604020202020204" pitchFamily="34" charset="0"/>
-              </a:rPr>
-              <a:t>EGYÉB OPERÁTOROK</a:t>
+                <a:latin typeface="Montserrat ExtraBold" panose="00000900000000000000" pitchFamily="2" charset="-18"/>
+              </a:rPr>
+              <a:t>Vannak olyan operátorok is, amelyek nem tartoznak az előző kategóriákba.</a:t>
             </a:r>
           </a:p>
           <a:p>
@@ -6172,19 +6643,123 @@
               <a:tabLst/>
             </a:pPr>
             <a:r>
-              <a:rPr kumimoji="0" lang="hu-HU" altLang="hu-HU" sz="1800" b="0" i="0" u="none" strike="noStrike" cap="none" normalizeH="0" baseline="0">
+              <a:rPr kumimoji="0" lang="hu-HU" altLang="hu-HU" sz="2400" b="0" i="0" u="none" strike="noStrike" cap="none" normalizeH="0" baseline="0" dirty="0">
                 <a:ln>
                   <a:noFill/>
                 </a:ln>
                 <a:solidFill>
-                  <a:schemeClr val="tx1"/>
+                  <a:srgbClr val="002060"/>
                 </a:solidFill>
                 <a:effectLst/>
-                <a:latin typeface="Arial" panose="020B0604020202020204" pitchFamily="34" charset="0"/>
-              </a:rPr>
-              <a:t>Vannak olyan operátorok is, amelyek nem tartoznak az előző kategóriákba.</a:t>
-            </a:r>
-          </a:p>
+                <a:latin typeface="Montserrat ExtraBold" panose="00000900000000000000" pitchFamily="2" charset="-18"/>
+              </a:rPr>
+              <a:t>++ Egyel növeli az értéket</a:t>
+            </a:r>
+            <a:br>
+              <a:rPr kumimoji="0" lang="hu-HU" altLang="hu-HU" sz="2400" b="0" i="0" u="none" strike="noStrike" cap="none" normalizeH="0" baseline="0" dirty="0">
+                <a:ln>
+                  <a:noFill/>
+                </a:ln>
+                <a:solidFill>
+                  <a:srgbClr val="002060"/>
+                </a:solidFill>
+                <a:effectLst/>
+                <a:latin typeface="Montserrat ExtraBold" panose="00000900000000000000" pitchFamily="2" charset="-18"/>
+              </a:rPr>
+            </a:br>
+            <a:r>
+              <a:rPr kumimoji="0" lang="hu-HU" altLang="hu-HU" sz="2400" b="0" i="0" u="none" strike="noStrike" cap="none" normalizeH="0" baseline="0" dirty="0">
+                <a:ln>
+                  <a:noFill/>
+                </a:ln>
+                <a:solidFill>
+                  <a:srgbClr val="002060"/>
+                </a:solidFill>
+                <a:effectLst/>
+                <a:latin typeface="Montserrat ExtraBold" panose="00000900000000000000" pitchFamily="2" charset="-18"/>
+              </a:rPr>
+              <a:t>-- Egyel csökkenti az értéket</a:t>
+            </a:r>
+            <a:br>
+              <a:rPr kumimoji="0" lang="hu-HU" altLang="hu-HU" sz="2400" b="0" i="0" u="none" strike="noStrike" cap="none" normalizeH="0" baseline="0" dirty="0">
+                <a:ln>
+                  <a:noFill/>
+                </a:ln>
+                <a:solidFill>
+                  <a:srgbClr val="002060"/>
+                </a:solidFill>
+                <a:effectLst/>
+                <a:latin typeface="Montserrat ExtraBold" panose="00000900000000000000" pitchFamily="2" charset="-18"/>
+              </a:rPr>
+            </a:br>
+            <a:r>
+              <a:rPr kumimoji="0" lang="hu-HU" altLang="hu-HU" sz="2400" b="0" i="0" u="none" strike="noStrike" cap="none" normalizeH="0" baseline="0" dirty="0">
+                <a:ln>
+                  <a:noFill/>
+                </a:ln>
+                <a:solidFill>
+                  <a:srgbClr val="002060"/>
+                </a:solidFill>
+                <a:effectLst/>
+                <a:latin typeface="Montserrat ExtraBold" panose="00000900000000000000" pitchFamily="2" charset="-18"/>
+              </a:rPr>
+              <a:t>?: Feltételes operátor</a:t>
+            </a:r>
+            <a:br>
+              <a:rPr kumimoji="0" lang="hu-HU" altLang="hu-HU" sz="2400" b="0" i="0" u="none" strike="noStrike" cap="none" normalizeH="0" baseline="0" dirty="0">
+                <a:ln>
+                  <a:noFill/>
+                </a:ln>
+                <a:solidFill>
+                  <a:srgbClr val="002060"/>
+                </a:solidFill>
+                <a:effectLst/>
+                <a:latin typeface="Montserrat ExtraBold" panose="00000900000000000000" pitchFamily="2" charset="-18"/>
+              </a:rPr>
+            </a:br>
+            <a:r>
+              <a:rPr kumimoji="0" lang="hu-HU" altLang="hu-HU" sz="2400" b="0" i="0" u="none" strike="noStrike" cap="none" normalizeH="0" baseline="0" dirty="0">
+                <a:ln>
+                  <a:noFill/>
+                </a:ln>
+                <a:solidFill>
+                  <a:srgbClr val="002060"/>
+                </a:solidFill>
+                <a:effectLst/>
+                <a:latin typeface="Montserrat ExtraBold" panose="00000900000000000000" pitchFamily="2" charset="-18"/>
+              </a:rPr>
+              <a:t>?? Null érték esetén alternatív értéket ad</a:t>
+            </a:r>
+          </a:p>
+        </p:txBody>
+      </p:sp>
+      <p:sp>
+        <p:nvSpPr>
+          <p:cNvPr id="4" name="Szövegdoboz 3">
+            <a:extLst>
+              <a:ext uri="{FF2B5EF4-FFF2-40B4-BE49-F238E27FC236}">
+                <a16:creationId xmlns:a16="http://schemas.microsoft.com/office/drawing/2014/main" id="{3481A3AD-72A7-4DE9-A55D-402E6CD316B2}"/>
+              </a:ext>
+            </a:extLst>
+          </p:cNvPr>
+          <p:cNvSpPr txBox="1"/>
+          <p:nvPr/>
+        </p:nvSpPr>
+        <p:spPr>
+          <a:xfrm>
+            <a:off x="3048000" y="247134"/>
+            <a:ext cx="6096000" cy="707886"/>
+          </a:xfrm>
+          <a:prstGeom prst="rect">
+            <a:avLst/>
+          </a:prstGeom>
+          <a:noFill/>
+        </p:spPr>
+        <p:txBody>
+          <a:bodyPr wrap="square">
+            <a:spAutoFit/>
+          </a:bodyPr>
+          <a:lstStyle/>
           <a:p>
             <a:pPr marL="0" marR="0" lvl="0" indent="0" algn="l" defTabSz="914400" rtl="0" eaLnBrk="0" fontAlgn="base" latinLnBrk="0" hangingPunct="0">
               <a:lnSpc>
@@ -6203,272 +6778,135 @@
               <a:tabLst/>
             </a:pPr>
             <a:r>
-              <a:rPr kumimoji="0" lang="hu-HU" altLang="hu-HU" sz="1800" b="0" i="0" u="none" strike="noStrike" cap="none" normalizeH="0" baseline="0">
+              <a:rPr kumimoji="0" lang="hu-HU" altLang="hu-HU" sz="4000" b="0" i="0" u="none" strike="noStrike" cap="none" normalizeH="0" baseline="0" dirty="0">
                 <a:ln>
                   <a:noFill/>
                 </a:ln>
                 <a:solidFill>
-                  <a:schemeClr val="tx1"/>
+                  <a:schemeClr val="bg1"/>
                 </a:solidFill>
                 <a:effectLst/>
-                <a:latin typeface="Arial" panose="020B0604020202020204" pitchFamily="34" charset="0"/>
-              </a:rPr>
-              <a:t>++ Egyel növeli az értéket</a:t>
-            </a:r>
-            <a:br>
-              <a:rPr kumimoji="0" lang="hu-HU" altLang="hu-HU" sz="1800" b="0" i="0" u="none" strike="noStrike" cap="none" normalizeH="0" baseline="0">
-                <a:ln>
-                  <a:noFill/>
-                </a:ln>
-                <a:solidFill>
-                  <a:schemeClr val="tx1"/>
-                </a:solidFill>
-                <a:effectLst/>
-                <a:latin typeface="Arial" panose="020B0604020202020204" pitchFamily="34" charset="0"/>
-              </a:rPr>
-            </a:br>
-            <a:r>
-              <a:rPr kumimoji="0" lang="hu-HU" altLang="hu-HU" sz="1800" b="0" i="0" u="none" strike="noStrike" cap="none" normalizeH="0" baseline="0">
-                <a:ln>
-                  <a:noFill/>
-                </a:ln>
-                <a:solidFill>
-                  <a:schemeClr val="tx1"/>
-                </a:solidFill>
-                <a:effectLst/>
-                <a:latin typeface="Arial" panose="020B0604020202020204" pitchFamily="34" charset="0"/>
-              </a:rPr>
-              <a:t>-- Egyel csökkenti az értéket</a:t>
-            </a:r>
-            <a:br>
-              <a:rPr kumimoji="0" lang="hu-HU" altLang="hu-HU" sz="1800" b="0" i="0" u="none" strike="noStrike" cap="none" normalizeH="0" baseline="0">
-                <a:ln>
-                  <a:noFill/>
-                </a:ln>
-                <a:solidFill>
-                  <a:schemeClr val="tx1"/>
-                </a:solidFill>
-                <a:effectLst/>
-                <a:latin typeface="Arial" panose="020B0604020202020204" pitchFamily="34" charset="0"/>
-              </a:rPr>
-            </a:br>
-            <a:r>
-              <a:rPr kumimoji="0" lang="hu-HU" altLang="hu-HU" sz="1800" b="0" i="0" u="none" strike="noStrike" cap="none" normalizeH="0" baseline="0">
-                <a:ln>
-                  <a:noFill/>
-                </a:ln>
-                <a:solidFill>
-                  <a:schemeClr val="tx1"/>
-                </a:solidFill>
-                <a:effectLst/>
-                <a:latin typeface="Arial" panose="020B0604020202020204" pitchFamily="34" charset="0"/>
-              </a:rPr>
-              <a:t>?: Feltételes operátor</a:t>
-            </a:r>
-            <a:br>
-              <a:rPr kumimoji="0" lang="hu-HU" altLang="hu-HU" sz="1800" b="0" i="0" u="none" strike="noStrike" cap="none" normalizeH="0" baseline="0">
-                <a:ln>
-                  <a:noFill/>
-                </a:ln>
-                <a:solidFill>
-                  <a:schemeClr val="tx1"/>
-                </a:solidFill>
-                <a:effectLst/>
-                <a:latin typeface="Arial" panose="020B0604020202020204" pitchFamily="34" charset="0"/>
-              </a:rPr>
-            </a:br>
-            <a:r>
-              <a:rPr kumimoji="0" lang="hu-HU" altLang="hu-HU" sz="1800" b="0" i="0" u="none" strike="noStrike" cap="none" normalizeH="0" baseline="0">
-                <a:ln>
-                  <a:noFill/>
-                </a:ln>
-                <a:solidFill>
-                  <a:schemeClr val="tx1"/>
-                </a:solidFill>
-                <a:effectLst/>
-                <a:latin typeface="Arial" panose="020B0604020202020204" pitchFamily="34" charset="0"/>
-              </a:rPr>
-              <a:t>?? Null érték esetén alternatív értéket ad</a:t>
-            </a:r>
-          </a:p>
-          <a:p>
-            <a:pPr marL="0" marR="0" lvl="0" indent="0" algn="l" defTabSz="914400" rtl="0" eaLnBrk="0" fontAlgn="base" latinLnBrk="0" hangingPunct="0">
-              <a:lnSpc>
-                <a:spcPct val="100000"/>
-              </a:lnSpc>
-              <a:spcBef>
-                <a:spcPct val="0"/>
-              </a:spcBef>
-              <a:spcAft>
-                <a:spcPct val="0"/>
-              </a:spcAft>
-              <a:buClrTx/>
-              <a:buSzTx/>
-              <a:buFontTx/>
-              <a:buNone/>
-              <a:tabLst/>
-            </a:pPr>
-            <a:r>
-              <a:rPr kumimoji="0" lang="hu-HU" altLang="hu-HU" sz="1800" b="0" i="0" u="none" strike="noStrike" cap="none" normalizeH="0" baseline="0">
-                <a:ln>
-                  <a:noFill/>
-                </a:ln>
-                <a:solidFill>
-                  <a:schemeClr val="tx1"/>
-                </a:solidFill>
-                <a:effectLst/>
-                <a:latin typeface="Arial" panose="020B0604020202020204" pitchFamily="34" charset="0"/>
-              </a:rPr>
-              <a:t>Példa:</a:t>
-            </a:r>
-          </a:p>
-          <a:p>
-            <a:pPr marL="0" marR="0" lvl="0" indent="0" algn="l" defTabSz="914400" rtl="0" eaLnBrk="0" fontAlgn="base" latinLnBrk="0" hangingPunct="0">
-              <a:lnSpc>
-                <a:spcPct val="100000"/>
-              </a:lnSpc>
-              <a:spcBef>
-                <a:spcPct val="0"/>
-              </a:spcBef>
-              <a:spcAft>
-                <a:spcPct val="0"/>
-              </a:spcAft>
-              <a:buClrTx/>
-              <a:buSzTx/>
-              <a:buFontTx/>
-              <a:buNone/>
-              <a:tabLst/>
-            </a:pPr>
-            <a:r>
-              <a:rPr kumimoji="0" lang="hu-HU" altLang="hu-HU" sz="1800" b="0" i="0" u="none" strike="noStrike" cap="none" normalizeH="0" baseline="0">
-                <a:ln>
-                  <a:noFill/>
-                </a:ln>
-                <a:solidFill>
-                  <a:schemeClr val="tx1"/>
-                </a:solidFill>
-                <a:effectLst/>
-                <a:latin typeface="Arial" panose="020B0604020202020204" pitchFamily="34" charset="0"/>
-              </a:rPr>
-              <a:t>int x = 5;</a:t>
-            </a:r>
-          </a:p>
-          <a:p>
-            <a:pPr marL="0" marR="0" lvl="0" indent="0" algn="l" defTabSz="914400" rtl="0" eaLnBrk="0" fontAlgn="base" latinLnBrk="0" hangingPunct="0">
-              <a:lnSpc>
-                <a:spcPct val="100000"/>
-              </a:lnSpc>
-              <a:spcBef>
-                <a:spcPct val="0"/>
-              </a:spcBef>
-              <a:spcAft>
-                <a:spcPct val="0"/>
-              </a:spcAft>
-              <a:buClrTx/>
-              <a:buSzTx/>
-              <a:buFontTx/>
-              <a:buNone/>
-              <a:tabLst/>
-            </a:pPr>
-            <a:r>
-              <a:rPr kumimoji="0" lang="hu-HU" altLang="hu-HU" sz="1800" b="0" i="0" u="none" strike="noStrike" cap="none" normalizeH="0" baseline="0">
-                <a:ln>
-                  <a:noFill/>
-                </a:ln>
-                <a:solidFill>
-                  <a:schemeClr val="tx1"/>
-                </a:solidFill>
-                <a:effectLst/>
-                <a:latin typeface="Arial" panose="020B0604020202020204" pitchFamily="34" charset="0"/>
-              </a:rPr>
-              <a:t>x++;</a:t>
-            </a:r>
-            <a:br>
-              <a:rPr kumimoji="0" lang="hu-HU" altLang="hu-HU" sz="1800" b="0" i="0" u="none" strike="noStrike" cap="none" normalizeH="0" baseline="0">
-                <a:ln>
-                  <a:noFill/>
-                </a:ln>
-                <a:solidFill>
-                  <a:schemeClr val="tx1"/>
-                </a:solidFill>
-                <a:effectLst/>
-                <a:latin typeface="Arial" panose="020B0604020202020204" pitchFamily="34" charset="0"/>
-              </a:rPr>
-            </a:br>
-            <a:r>
-              <a:rPr kumimoji="0" lang="hu-HU" altLang="hu-HU" sz="1800" b="0" i="0" u="none" strike="noStrike" cap="none" normalizeH="0" baseline="0">
-                <a:ln>
-                  <a:noFill/>
-                </a:ln>
-                <a:solidFill>
-                  <a:schemeClr val="tx1"/>
-                </a:solidFill>
-                <a:effectLst/>
-                <a:latin typeface="Arial" panose="020B0604020202020204" pitchFamily="34" charset="0"/>
-              </a:rPr>
-              <a:t>Console.WriteLine(x); // 6</a:t>
-            </a:r>
-          </a:p>
-          <a:p>
-            <a:pPr marL="0" marR="0" lvl="0" indent="0" algn="l" defTabSz="914400" rtl="0" eaLnBrk="0" fontAlgn="base" latinLnBrk="0" hangingPunct="0">
-              <a:lnSpc>
-                <a:spcPct val="100000"/>
-              </a:lnSpc>
-              <a:spcBef>
-                <a:spcPct val="0"/>
-              </a:spcBef>
-              <a:spcAft>
-                <a:spcPct val="0"/>
-              </a:spcAft>
-              <a:buClrTx/>
-              <a:buSzTx/>
-              <a:buFontTx/>
-              <a:buNone/>
-              <a:tabLst/>
-            </a:pPr>
-            <a:r>
-              <a:rPr kumimoji="0" lang="hu-HU" altLang="hu-HU" sz="1800" b="0" i="0" u="none" strike="noStrike" cap="none" normalizeH="0" baseline="0">
-                <a:ln>
-                  <a:noFill/>
-                </a:ln>
-                <a:solidFill>
-                  <a:schemeClr val="tx1"/>
-                </a:solidFill>
-                <a:effectLst/>
-                <a:latin typeface="Arial" panose="020B0604020202020204" pitchFamily="34" charset="0"/>
-              </a:rPr>
-              <a:t>string name = null;</a:t>
-            </a:r>
-          </a:p>
-          <a:p>
-            <a:pPr marL="0" marR="0" lvl="0" indent="0" algn="l" defTabSz="914400" rtl="0" eaLnBrk="0" fontAlgn="base" latinLnBrk="0" hangingPunct="0">
-              <a:lnSpc>
-                <a:spcPct val="100000"/>
-              </a:lnSpc>
-              <a:spcBef>
-                <a:spcPct val="0"/>
-              </a:spcBef>
-              <a:spcAft>
-                <a:spcPct val="0"/>
-              </a:spcAft>
-              <a:buClrTx/>
-              <a:buSzTx/>
-              <a:buFontTx/>
-              <a:buNone/>
-              <a:tabLst/>
-            </a:pPr>
-            <a:r>
-              <a:rPr kumimoji="0" lang="hu-HU" altLang="hu-HU" sz="1800" b="0" i="0" u="none" strike="noStrike" cap="none" normalizeH="0" baseline="0">
-                <a:ln>
-                  <a:noFill/>
-                </a:ln>
-                <a:solidFill>
-                  <a:schemeClr val="tx1"/>
-                </a:solidFill>
-                <a:effectLst/>
-                <a:latin typeface="Arial" panose="020B0604020202020204" pitchFamily="34" charset="0"/>
-              </a:rPr>
-              <a:t>string result = name ?? "Ismeretlen";</a:t>
+                <a:latin typeface="Montserrat ExtraBold" panose="00000900000000000000" pitchFamily="2" charset="-18"/>
+              </a:rPr>
+              <a:t>EGYÉB OPERÁTOROK</a:t>
+            </a:r>
+          </a:p>
+        </p:txBody>
+      </p:sp>
+      <p:pic>
+        <p:nvPicPr>
+          <p:cNvPr id="6" name="Kép 5">
+            <a:extLst>
+              <a:ext uri="{FF2B5EF4-FFF2-40B4-BE49-F238E27FC236}">
+                <a16:creationId xmlns:a16="http://schemas.microsoft.com/office/drawing/2014/main" id="{8361DD3F-0D20-4C1F-BD23-53C4142B115C}"/>
+              </a:ext>
+            </a:extLst>
+          </p:cNvPr>
+          <p:cNvPicPr>
+            <a:picLocks noChangeAspect="1"/>
+          </p:cNvPicPr>
+          <p:nvPr/>
+        </p:nvPicPr>
+        <p:blipFill>
+          <a:blip r:embed="rId2"/>
+          <a:stretch>
+            <a:fillRect/>
+          </a:stretch>
+        </p:blipFill>
+        <p:spPr>
+          <a:xfrm>
+            <a:off x="5544252" y="1261171"/>
+            <a:ext cx="7199496" cy="4555066"/>
+          </a:xfrm>
+          <a:prstGeom prst="rect">
+            <a:avLst/>
+          </a:prstGeom>
+        </p:spPr>
+      </p:pic>
+      <p:pic>
+        <p:nvPicPr>
+          <p:cNvPr id="7" name="Picture 10">
+            <a:hlinkClick r:id="rId3" action="ppaction://hlinksldjump"/>
+            <a:extLst>
+              <a:ext uri="{FF2B5EF4-FFF2-40B4-BE49-F238E27FC236}">
+                <a16:creationId xmlns:a16="http://schemas.microsoft.com/office/drawing/2014/main" id="{F7AE1360-6950-47F7-B515-00AA10F00C1E}"/>
+              </a:ext>
+            </a:extLst>
+          </p:cNvPr>
+          <p:cNvPicPr>
+            <a:picLocks noChangeAspect="1" noChangeArrowheads="1"/>
+          </p:cNvPicPr>
+          <p:nvPr/>
+        </p:nvPicPr>
+        <p:blipFill>
+          <a:blip r:embed="rId4">
+            <a:extLst>
+              <a:ext uri="{28A0092B-C50C-407E-A947-70E740481C1C}">
+                <a14:useLocalDpi xmlns:a14="http://schemas.microsoft.com/office/drawing/2010/main" val="0"/>
+              </a:ext>
+            </a:extLst>
+          </a:blip>
+          <a:srcRect/>
+          <a:stretch>
+            <a:fillRect/>
+          </a:stretch>
+        </p:blipFill>
+        <p:spPr bwMode="auto">
+          <a:xfrm>
+            <a:off x="10785755" y="5700821"/>
+            <a:ext cx="1324810" cy="1324810"/>
+          </a:xfrm>
+          <a:prstGeom prst="rect">
+            <a:avLst/>
+          </a:prstGeom>
+          <a:noFill/>
+          <a:extLst>
+            <a:ext uri="{909E8E84-426E-40DD-AFC4-6F175D3DCCD1}">
+              <a14:hiddenFill xmlns:a14="http://schemas.microsoft.com/office/drawing/2010/main">
+                <a:solidFill>
+                  <a:srgbClr val="FFFFFF"/>
+                </a:solidFill>
+              </a14:hiddenFill>
+            </a:ext>
+          </a:extLst>
+        </p:spPr>
+      </p:pic>
+      <p:sp>
+        <p:nvSpPr>
+          <p:cNvPr id="8" name="Szövegdoboz 7">
+            <a:extLst>
+              <a:ext uri="{FF2B5EF4-FFF2-40B4-BE49-F238E27FC236}">
+                <a16:creationId xmlns:a16="http://schemas.microsoft.com/office/drawing/2014/main" id="{890E84C0-C9FB-409E-9C3A-8D360757F9F5}"/>
+              </a:ext>
+            </a:extLst>
+          </p:cNvPr>
+          <p:cNvSpPr txBox="1"/>
+          <p:nvPr/>
+        </p:nvSpPr>
+        <p:spPr>
+          <a:xfrm>
+            <a:off x="11172079" y="5700821"/>
+            <a:ext cx="552162" cy="230832"/>
+          </a:xfrm>
+          <a:prstGeom prst="rect">
+            <a:avLst/>
+          </a:prstGeom>
+          <a:noFill/>
+        </p:spPr>
+        <p:txBody>
+          <a:bodyPr wrap="square" rtlCol="0">
+            <a:spAutoFit/>
+          </a:bodyPr>
+          <a:lstStyle/>
+          <a:p>
+            <a:r>
+              <a:rPr lang="hu-HU" sz="900" dirty="0">
+                <a:solidFill>
+                  <a:schemeClr val="bg1"/>
+                </a:solidFill>
+                <a:latin typeface="Montserrat ExtraBold" panose="00000900000000000000" pitchFamily="2" charset="-18"/>
+              </a:rPr>
+              <a:t>BACK</a:t>
             </a:r>
           </a:p>
         </p:txBody>
@@ -6483,6 +6921,198 @@
   <p:clrMapOvr>
     <a:masterClrMapping/>
   </p:clrMapOvr>
+  <mc:AlternateContent xmlns:mc="http://schemas.openxmlformats.org/markup-compatibility/2006">
+    <mc:Choice xmlns:p159="http://schemas.microsoft.com/office/powerpoint/2015/09/main" Requires="p159">
+      <p:transition xmlns:p14="http://schemas.microsoft.com/office/powerpoint/2010/main" spd="slow" p14:dur="2000">
+        <p159:morph option="byChar"/>
+      </p:transition>
+    </mc:Choice>
+    <mc:Fallback>
+      <p:transition spd="slow">
+        <p:fade/>
+      </p:transition>
+    </mc:Fallback>
+  </mc:AlternateContent>
+</p:sld>
+</file>
+
+<file path=ppt/slides/slide9.xml><?xml version="1.0" encoding="utf-8"?>
+<p:sld xmlns:a="http://schemas.openxmlformats.org/drawingml/2006/main" xmlns:r="http://schemas.openxmlformats.org/officeDocument/2006/relationships" xmlns:p="http://schemas.openxmlformats.org/presentationml/2006/main">
+  <p:cSld>
+    <p:spTree>
+      <p:nvGrpSpPr>
+        <p:cNvPr id="1" name=""/>
+        <p:cNvGrpSpPr/>
+        <p:nvPr/>
+      </p:nvGrpSpPr>
+      <p:grpSpPr>
+        <a:xfrm>
+          <a:off x="0" y="0"/>
+          <a:ext cx="0" cy="0"/>
+          <a:chOff x="0" y="0"/>
+          <a:chExt cx="0" cy="0"/>
+        </a:xfrm>
+      </p:grpSpPr>
+      <p:cxnSp>
+        <p:nvCxnSpPr>
+          <p:cNvPr id="11" name="Google Shape;165;p38">
+            <a:extLst>
+              <a:ext uri="{FF2B5EF4-FFF2-40B4-BE49-F238E27FC236}">
+                <a16:creationId xmlns:a16="http://schemas.microsoft.com/office/drawing/2014/main" id="{2ED107DC-E0F5-4236-BC86-D30F6A9FB5BB}"/>
+              </a:ext>
+            </a:extLst>
+          </p:cNvPr>
+          <p:cNvCxnSpPr>
+            <a:cxnSpLocks/>
+          </p:cNvCxnSpPr>
+          <p:nvPr/>
+        </p:nvCxnSpPr>
+        <p:spPr>
+          <a:xfrm flipV="1">
+            <a:off x="2589814" y="2785758"/>
+            <a:ext cx="7012373" cy="1"/>
+          </a:xfrm>
+          <a:prstGeom prst="straightConnector1">
+            <a:avLst/>
+          </a:prstGeom>
+          <a:noFill/>
+          <a:ln w="19050" cap="flat" cmpd="sng">
+            <a:solidFill>
+              <a:schemeClr val="accent1"/>
+            </a:solidFill>
+            <a:prstDash val="solid"/>
+            <a:round/>
+            <a:headEnd type="none" w="med" len="med"/>
+            <a:tailEnd type="none" w="med" len="med"/>
+          </a:ln>
+          <a:effectLst>
+            <a:outerShdw blurRad="57150" dist="19050" dir="5400000" algn="bl" rotWithShape="0">
+              <a:srgbClr val="FFFFFF">
+                <a:alpha val="50000"/>
+              </a:srgbClr>
+            </a:outerShdw>
+          </a:effectLst>
+        </p:spPr>
+      </p:cxnSp>
+      <p:sp>
+        <p:nvSpPr>
+          <p:cNvPr id="4" name="Szövegdoboz 3">
+            <a:extLst>
+              <a:ext uri="{FF2B5EF4-FFF2-40B4-BE49-F238E27FC236}">
+                <a16:creationId xmlns:a16="http://schemas.microsoft.com/office/drawing/2014/main" id="{1E1B5824-8B80-44ED-8C0C-77666160309D}"/>
+              </a:ext>
+            </a:extLst>
+          </p:cNvPr>
+          <p:cNvSpPr txBox="1"/>
+          <p:nvPr/>
+        </p:nvSpPr>
+        <p:spPr>
+          <a:xfrm>
+            <a:off x="2015066" y="1631596"/>
+            <a:ext cx="8161868" cy="2308324"/>
+          </a:xfrm>
+          <a:prstGeom prst="rect">
+            <a:avLst/>
+          </a:prstGeom>
+          <a:noFill/>
+        </p:spPr>
+        <p:txBody>
+          <a:bodyPr wrap="square" rtlCol="0">
+            <a:spAutoFit/>
+          </a:bodyPr>
+          <a:lstStyle/>
+          <a:p>
+            <a:pPr algn="ctr"/>
+            <a:r>
+              <a:rPr lang="hu-HU" sz="7200" b="1" cap="all" dirty="0" err="1">
+                <a:solidFill>
+                  <a:schemeClr val="bg1"/>
+                </a:solidFill>
+                <a:latin typeface="Montserrat ExtraBold" panose="00000900000000000000" pitchFamily="2" charset="-18"/>
+              </a:rPr>
+              <a:t>KÖSzönjük</a:t>
+            </a:r>
+            <a:r>
+              <a:rPr lang="hu-HU" sz="7200" b="1" cap="all" dirty="0">
+                <a:solidFill>
+                  <a:schemeClr val="bg1"/>
+                </a:solidFill>
+                <a:latin typeface="Montserrat ExtraBold" panose="00000900000000000000" pitchFamily="2" charset="-18"/>
+              </a:rPr>
+              <a:t> a figyelmet !</a:t>
+            </a:r>
+          </a:p>
+        </p:txBody>
+      </p:sp>
+      <p:pic>
+        <p:nvPicPr>
+          <p:cNvPr id="7" name="Picture 10">
+            <a:extLst>
+              <a:ext uri="{FF2B5EF4-FFF2-40B4-BE49-F238E27FC236}">
+                <a16:creationId xmlns:a16="http://schemas.microsoft.com/office/drawing/2014/main" id="{DEC8304F-8205-4588-A781-0D7D63E08347}"/>
+              </a:ext>
+            </a:extLst>
+          </p:cNvPr>
+          <p:cNvPicPr>
+            <a:picLocks noChangeAspect="1" noChangeArrowheads="1"/>
+          </p:cNvPicPr>
+          <p:nvPr/>
+        </p:nvPicPr>
+        <p:blipFill>
+          <a:blip r:embed="rId2">
+            <a:extLst>
+              <a:ext uri="{28A0092B-C50C-407E-A947-70E740481C1C}">
+                <a14:useLocalDpi xmlns:a14="http://schemas.microsoft.com/office/drawing/2010/main" val="0"/>
+              </a:ext>
+            </a:extLst>
+          </a:blip>
+          <a:srcRect/>
+          <a:stretch>
+            <a:fillRect/>
+          </a:stretch>
+        </p:blipFill>
+        <p:spPr bwMode="auto">
+          <a:xfrm>
+            <a:off x="4703233" y="4394718"/>
+            <a:ext cx="2785533" cy="2785533"/>
+          </a:xfrm>
+          <a:prstGeom prst="rect">
+            <a:avLst/>
+          </a:prstGeom>
+          <a:noFill/>
+          <a:extLst>
+            <a:ext uri="{909E8E84-426E-40DD-AFC4-6F175D3DCCD1}">
+              <a14:hiddenFill xmlns:a14="http://schemas.microsoft.com/office/drawing/2010/main">
+                <a:solidFill>
+                  <a:srgbClr val="FFFFFF"/>
+                </a:solidFill>
+              </a14:hiddenFill>
+            </a:ext>
+          </a:extLst>
+        </p:spPr>
+      </p:pic>
+    </p:spTree>
+    <p:extLst>
+      <p:ext uri="{BB962C8B-B14F-4D97-AF65-F5344CB8AC3E}">
+        <p14:creationId xmlns:p14="http://schemas.microsoft.com/office/powerpoint/2010/main" val="492959081"/>
+      </p:ext>
+    </p:extLst>
+  </p:cSld>
+  <p:clrMapOvr>
+    <a:masterClrMapping/>
+  </p:clrMapOvr>
+  <mc:AlternateContent xmlns:mc="http://schemas.openxmlformats.org/markup-compatibility/2006">
+    <mc:Choice xmlns:p159="http://schemas.microsoft.com/office/powerpoint/2015/09/main" Requires="p159">
+      <p:transition xmlns:p14="http://schemas.microsoft.com/office/powerpoint/2010/main" spd="slow" p14:dur="2000">
+        <p159:morph option="byChar"/>
+      </p:transition>
+    </mc:Choice>
+    <mc:Fallback>
+      <p:transition spd="slow">
+        <p:fade/>
+      </p:transition>
+    </mc:Fallback>
+  </mc:AlternateContent>
 </p:sld>
 </file>
 
